--- a/presentation/soutenance.pptx
+++ b/presentation/soutenance.pptx
@@ -16649,7 +16649,7 @@
                 </a:solidFill>
                 <a:latin typeface="Calibri"/>
               </a:rPr>
-              <a:t>— R² de 0,14 — moins bon que d'annoncer toujours la médiane. Elle dépend de ce qui se passe APRÈS le départ : vent, délai d'intervention, relief. En revanche « sera-ce un grand feu de plus de 5 hectares ? » se prédit à 0,77 de ROC-AUC.</a:t>
+              <a:t>— R² de 0,14 — moins bon que d'annoncer toujours la médiane. Elle dépend de ce qui se passe APRÈS le départ : vent, délai d'intervention, relief.</a:t>
             </a:r>
           </a:p>
         </p:txBody>
@@ -16688,7 +16688,7 @@
                 </a:solidFill>
                 <a:latin typeface="Calibri"/>
               </a:rPr>
-              <a:t>Une commune-jour n'est pas un incendie.</a:t>
+              <a:t>Et « sera-ce un grand feu ? » se prédit mal aussi.</a:t>
             </a:r>
           </a:p>
         </p:txBody>
@@ -16727,7 +16727,7 @@
                 </a:solidFill>
                 <a:latin typeface="Calibri"/>
               </a:rPr>
-              <a:t>— Un feu traversant cinq communes compte cinq fois.</a:t>
+              <a:t>— lift de 2.9× seulement, contre 63.7× pour les départs. On lit parfois « ROC-AUC 0,77 » : c'est exact, mais s'en servir après avoir expliqué pourquoi la ROC-AUC flatte serait se contredire.</a:t>
             </a:r>
           </a:p>
         </p:txBody>
@@ -16766,7 +16766,7 @@
                 </a:solidFill>
                 <a:latin typeface="Calibri"/>
               </a:rPr>
-              <a:t>31 communes partagent une maille météo de 28 km.</a:t>
+              <a:t>Une commune-jour n'est pas un incendie.</a:t>
             </a:r>
           </a:p>
         </p:txBody>
@@ -16805,7 +16805,7 @@
                 </a:solidFill>
                 <a:latin typeface="Calibri"/>
               </a:rPr>
-              <a:t>— Le FWI porte le quand, la végétation porte le où. Conséquence statistique : les intervalles naïfs sur les coefficients météo seraient trop étroits.</a:t>
+              <a:t>— Un feu traversant cinq communes compte cinq fois.</a:t>
             </a:r>
           </a:p>
         </p:txBody>
@@ -16844,7 +16844,7 @@
                 </a:solidFill>
                 <a:latin typeface="Calibri"/>
               </a:rPr>
-              <a:t>Le LSTM n'a pas reçu danger_effis.</a:t>
+              <a:t>31 communes partagent une maille météo de 28 km.</a:t>
             </a:r>
           </a:p>
         </p:txBody>
@@ -16858,6 +16858,84 @@
         <p:spPr>
           <a:xfrm>
             <a:off x="684000" y="5119200"/>
+            <a:ext cx="10800000" cy="453600"/>
+          </a:xfrm>
+          <a:prstGeom prst="rect">
+            <a:avLst/>
+          </a:prstGeom>
+          <a:noFill/>
+        </p:spPr>
+        <p:txBody>
+          <a:bodyPr wrap="square">
+            <a:spAutoFit/>
+          </a:bodyPr>
+          <a:lstStyle/>
+          <a:p>
+            <a:pPr>
+              <a:lnSpc>
+                <a:spcPct val="125000"/>
+              </a:lnSpc>
+            </a:pPr>
+            <a:r>
+              <a:rPr sz="1500" b="0">
+                <a:solidFill>
+                  <a:srgbClr val="6B6963"/>
+                </a:solidFill>
+                <a:latin typeface="Calibri"/>
+              </a:rPr>
+              <a:t>— Le FWI porte le quand, la végétation porte le où. Conséquence statistique : les intervalles naïfs sur les coefficients météo seraient trop étroits.</a:t>
+            </a:r>
+          </a:p>
+        </p:txBody>
+      </p:sp>
+      <p:sp>
+        <p:nvSpPr>
+          <p:cNvPr id="13" name="TextBox 12"/>
+          <p:cNvSpPr txBox="1"/>
+          <p:nvPr/>
+        </p:nvSpPr>
+        <p:spPr>
+          <a:xfrm>
+            <a:off x="684000" y="5572800"/>
+            <a:ext cx="10800000" cy="453600"/>
+          </a:xfrm>
+          <a:prstGeom prst="rect">
+            <a:avLst/>
+          </a:prstGeom>
+          <a:noFill/>
+        </p:spPr>
+        <p:txBody>
+          <a:bodyPr wrap="square">
+            <a:spAutoFit/>
+          </a:bodyPr>
+          <a:lstStyle/>
+          <a:p>
+            <a:pPr>
+              <a:lnSpc>
+                <a:spcPct val="125000"/>
+              </a:lnSpc>
+            </a:pPr>
+            <a:r>
+              <a:rPr sz="1500" b="1">
+                <a:solidFill>
+                  <a:srgbClr val="0B0B0B"/>
+                </a:solidFill>
+                <a:latin typeface="Calibri"/>
+              </a:rPr>
+              <a:t>Le LSTM n'a pas reçu danger_effis.</a:t>
+            </a:r>
+          </a:p>
+        </p:txBody>
+      </p:sp>
+      <p:sp>
+        <p:nvSpPr>
+          <p:cNvPr id="14" name="TextBox 13"/>
+          <p:cNvSpPr txBox="1"/>
+          <p:nvPr/>
+        </p:nvSpPr>
+        <p:spPr>
+          <a:xfrm>
+            <a:off x="684000" y="6026400"/>
             <a:ext cx="10800000" cy="453600"/>
           </a:xfrm>
           <a:prstGeom prst="rect">

--- a/presentation/soutenance.pptx
+++ b/presentation/soutenance.pptx
@@ -678,6 +678,12 @@
           <a:lstStyle/>
           <a:p>
             <a:r>
+              <a:t>Détail d'implémentation, à garder pour les questions : la moyenne pondérée des précisions est recalculée par tri unique puis sommes cumulées, au lieu d'appeler scikit-learn 200 fois. Résultat identique à 1e-12 près, et la comparaison complète tient en quelques minutes au lieu de plusieurs heures.</a:t>
+            </a:r>
+          </a:p>
+          <a:p/>
+          <a:p>
+            <a:r>
               <a:t>Si on demande pourquoi 200 répliques : au-delà, la largeur des intervalles ne bouge plus de façon utile, et le coût est linéaire.</a:t>
             </a:r>
           </a:p>
@@ -1168,6 +1174,18 @@
           <a:lstStyle/>
           <a:p>
             <a:r>
+              <a:t>Lire la figure de haut en bas : le FFMC réagit au jour le jour sur 1 à 2 cm de litière, le DMC lisse sur 5 à 10 cm, le DC monte et redescend sur toute la saison à 10-20 cm de profondeur. Trois constantes de temps, visibles à l'œil.</a:t>
+            </a:r>
+          </a:p>
+          <a:p/>
+          <a:p>
+            <a:r>
+              <a:t>Nuance à donner si on interroge la PACF : les retards 4 à 8 restent significatifs. Avec 7 305 jours le seuil descend à ±0.023 et presque tout le devient, mais le retard 8, à 0.034, ne rend compte que de 0.11 % de la variance. Significatif ne veut pas dire utile.</a:t>
+            </a:r>
+          </a:p>
+          <a:p/>
+          <a:p>
+            <a:r>
               <a:t>Réserve à donner spontanément, sans attendre la question : le LSTM ne reçoit pas danger_effis, qui pèse 13,7 % dans le modèle C. L'écart de 23,6 % est donc un majorant, et c'est la première chose à reprendre.</a:t>
             </a:r>
           </a:p>
@@ -1241,6 +1259,12 @@
               <a:t>Ce détour n'est pas décoratif : il montre que la conclusion sur le LSTM ne dépend pas d'une seule expérience, mais de trois familles de méthodes qui disent la même chose.</a:t>
             </a:r>
           </a:p>
+          <a:p/>
+          <a:p>
+            <a:r>
+              <a:t>Les corrélogrammes de droite : en haut la série brute, où l'ACF ne montre que le cycle annuel parce que tout est corrélé à tout pendant l'été. En bas, après retrait de la saisonnalité par termes de Fourier, seules courbes exploitables pour choisir les ordres.</a:t>
+            </a:r>
+          </a:p>
         </p:txBody>
       </p:sp>
       <p:sp>
@@ -1378,6 +1402,12 @@
           <a:lstStyle/>
           <a:p>
             <a:r>
+              <a:t>Développer le point 1 à l'oral : les feux de 2026 sortiront au printemps 2027. Si je lançais le modèle ce matin, feux_commune_7j vaudrait le décompte d'une semaine de décembre 2025.</a:t>
+            </a:r>
+          </a:p>
+          <a:p/>
+          <a:p>
+            <a:r>
               <a:t>Dans l'application, un basculement permet de comparer les deux modèles, et il refuse de le faire ailleurs que sur le test, en expliquant pourquoi pour chaque période.</a:t>
             </a:r>
           </a:p>
@@ -1868,6 +1898,12 @@
           <a:lstStyle/>
           <a:p>
             <a:r>
+              <a:t>Le détail d'implémentation qui change tout, à raconter plutôt qu'à afficher : DiCE cherche par défaut à faire passer la probabilité sous 0,5. Or le score n'est pas calibré, 0,5 correspond à un risque astronomique, et l'outil ne renvoyait jamais rien. On a recentré la frontière sur le décile par une transformation strictement croissante, qui laisse le classement intact. La question devient « que faudrait-il pour sortir des 10 % les plus à risque », celle qui a un sens opérationnel.</a:t>
+            </a:r>
+          </a:p>
+          <a:p/>
+          <a:p>
+            <a:r>
               <a:t>Sur LIME, si la question vient : sur un modèle d'arbres il approxime ce que TreeSHAP calcule exactement, donc il ne peut pas faire mieux. Il redeviendrait le bon outil sur un modèle qu'on ne peut pas ouvrir, une API ou un réseau profond.</a:t>
             </a:r>
           </a:p>
@@ -2078,6 +2114,12 @@
           <a:lstStyle/>
           <a:p>
             <a:r>
+              <a:t>Montrer la grille en parlant : chaque carreau bleu est une cellule météo, il y en a 1 131 sur la France. C'est la résolution à laquelle le danger est publié aujourd'hui.</a:t>
+            </a:r>
+          </a:p>
+          <a:p/>
+          <a:p>
+            <a:r>
               <a:t>Formuler l'apport sans exagérer : on ne remplace pas le FWI, on l'utilise comme entrée principale et on lui ajoute une résolution spatiale qu'il n'a pas.</a:t>
             </a:r>
           </a:p>
@@ -2148,6 +2190,12 @@
           <a:lstStyle/>
           <a:p>
             <a:r>
+              <a:t>Sur le grand feu, ajouter à l'oral : on lit parfois une ROC-AUC de 0,77 sur cette tâche. C'est exact, mais m'en servir après avoir expliqué pourquoi la ROC-AUC flatte serait me contredire.</a:t>
+            </a:r>
+          </a:p>
+          <a:p/>
+          <a:p>
+            <a:r>
               <a:t>Enchaîner directement sur la conclusion : ces limites définissent la suite du travail, elles ne l'invalident pas.</a:t>
             </a:r>
           </a:p>
@@ -2219,6 +2267,18 @@
           <a:p>
             <a:r>
               <a:t>Faire la démonstration ici : la carte d'abord, puis le basculement rétrospectif sur une date d'août, puis la page Pourquoi. Prévoir trois minutes.</a:t>
+            </a:r>
+          </a:p>
+          <a:p/>
+          <a:p>
+            <a:r>
+              <a:t>Les trois raisons du refus, à énoncer : le train parce qu'il a appris ces lignes, la validation parce qu'elle a servi à choisir, l'avenir parce qu'il n'y a pas d'historique.</a:t>
+            </a:r>
+          </a:p>
+          <a:p/>
+          <a:p>
+            <a:r>
+              <a:t>Réveiller l'application dix minutes avant de passer : elle s'endort après inactivité et met environ deux minutes à revenir.</a:t>
             </a:r>
           </a:p>
         </p:txBody>
@@ -5978,7 +6038,46 @@
       <p:grpSpPr/>
       <p:sp>
         <p:nvSpPr>
-          <p:cNvPr id="2" name="Rectangle 1"/>
+          <p:cNvPr id="2" name="TextBox 1"/>
+          <p:cNvSpPr txBox="1"/>
+          <p:nvPr/>
+        </p:nvSpPr>
+        <p:spPr>
+          <a:xfrm>
+            <a:off x="11520000" y="6390000"/>
+            <a:ext cx="503999" cy="251999"/>
+          </a:xfrm>
+          <a:prstGeom prst="rect">
+            <a:avLst/>
+          </a:prstGeom>
+          <a:noFill/>
+        </p:spPr>
+        <p:txBody>
+          <a:bodyPr wrap="square">
+            <a:spAutoFit/>
+          </a:bodyPr>
+          <a:lstStyle/>
+          <a:p>
+            <a:pPr algn="r">
+              <a:lnSpc>
+                <a:spcPct val="125000"/>
+              </a:lnSpc>
+            </a:pPr>
+            <a:r>
+              <a:rPr sz="900" b="0">
+                <a:solidFill>
+                  <a:srgbClr val="6B6963"/>
+                </a:solidFill>
+                <a:latin typeface="Calibri"/>
+              </a:rPr>
+              <a:t>10</a:t>
+            </a:r>
+          </a:p>
+        </p:txBody>
+      </p:sp>
+      <p:sp>
+        <p:nvSpPr>
+          <p:cNvPr id="3" name="Rectangle 2"/>
           <p:cNvSpPr/>
           <p:nvPr/>
         </p:nvSpPr>
@@ -6022,7 +6121,7 @@
       </p:sp>
       <p:sp>
         <p:nvSpPr>
-          <p:cNvPr id="3" name="TextBox 2"/>
+          <p:cNvPr id="4" name="TextBox 3"/>
           <p:cNvSpPr txBox="1"/>
           <p:nvPr/>
         </p:nvSpPr>
@@ -6061,7 +6160,7 @@
       </p:sp>
       <p:sp>
         <p:nvSpPr>
-          <p:cNvPr id="4" name="TextBox 3"/>
+          <p:cNvPr id="5" name="TextBox 4"/>
           <p:cNvSpPr txBox="1"/>
           <p:nvPr/>
         </p:nvSpPr>
@@ -6100,7 +6199,7 @@
       </p:sp>
       <p:graphicFrame>
         <p:nvGraphicFramePr>
-          <p:cNvPr id="5" name="Table 4"/>
+          <p:cNvPr id="6" name="Table 5"/>
           <p:cNvGraphicFramePr>
             <a:graphicFrameLocks noGrp="1"/>
           </p:cNvGraphicFramePr>
@@ -6689,7 +6788,7 @@
       </p:graphicFrame>
       <p:sp>
         <p:nvSpPr>
-          <p:cNvPr id="6" name="Rectangle 5"/>
+          <p:cNvPr id="7" name="Rectangle 6"/>
           <p:cNvSpPr/>
           <p:nvPr/>
         </p:nvSpPr>
@@ -6733,7 +6832,7 @@
       </p:sp>
       <p:sp>
         <p:nvSpPr>
-          <p:cNvPr id="7" name="TextBox 6"/>
+          <p:cNvPr id="8" name="TextBox 7"/>
           <p:cNvSpPr txBox="1"/>
           <p:nvPr/>
         </p:nvSpPr>
@@ -6814,7 +6913,46 @@
       <p:grpSpPr/>
       <p:sp>
         <p:nvSpPr>
-          <p:cNvPr id="2" name="Rectangle 1"/>
+          <p:cNvPr id="2" name="TextBox 1"/>
+          <p:cNvSpPr txBox="1"/>
+          <p:nvPr/>
+        </p:nvSpPr>
+        <p:spPr>
+          <a:xfrm>
+            <a:off x="11520000" y="6390000"/>
+            <a:ext cx="503999" cy="251999"/>
+          </a:xfrm>
+          <a:prstGeom prst="rect">
+            <a:avLst/>
+          </a:prstGeom>
+          <a:noFill/>
+        </p:spPr>
+        <p:txBody>
+          <a:bodyPr wrap="square">
+            <a:spAutoFit/>
+          </a:bodyPr>
+          <a:lstStyle/>
+          <a:p>
+            <a:pPr algn="r">
+              <a:lnSpc>
+                <a:spcPct val="125000"/>
+              </a:lnSpc>
+            </a:pPr>
+            <a:r>
+              <a:rPr sz="900" b="0">
+                <a:solidFill>
+                  <a:srgbClr val="6B6963"/>
+                </a:solidFill>
+                <a:latin typeface="Calibri"/>
+              </a:rPr>
+              <a:t>11</a:t>
+            </a:r>
+          </a:p>
+        </p:txBody>
+      </p:sp>
+      <p:sp>
+        <p:nvSpPr>
+          <p:cNvPr id="3" name="Rectangle 2"/>
           <p:cNvSpPr/>
           <p:nvPr/>
         </p:nvSpPr>
@@ -6858,7 +6996,7 @@
       </p:sp>
       <p:sp>
         <p:nvSpPr>
-          <p:cNvPr id="3" name="TextBox 2"/>
+          <p:cNvPr id="4" name="TextBox 3"/>
           <p:cNvSpPr txBox="1"/>
           <p:nvPr/>
         </p:nvSpPr>
@@ -6897,7 +7035,7 @@
       </p:sp>
       <p:sp>
         <p:nvSpPr>
-          <p:cNvPr id="4" name="TextBox 3"/>
+          <p:cNvPr id="5" name="TextBox 4"/>
           <p:cNvSpPr txBox="1"/>
           <p:nvPr/>
         </p:nvSpPr>
@@ -6936,7 +7074,7 @@
       </p:sp>
       <p:sp>
         <p:nvSpPr>
-          <p:cNvPr id="5" name="TextBox 4"/>
+          <p:cNvPr id="6" name="TextBox 5"/>
           <p:cNvSpPr txBox="1"/>
           <p:nvPr/>
         </p:nvSpPr>
@@ -6975,7 +7113,7 @@
       </p:sp>
       <p:sp>
         <p:nvSpPr>
-          <p:cNvPr id="6" name="TextBox 5"/>
+          <p:cNvPr id="7" name="TextBox 6"/>
           <p:cNvSpPr txBox="1"/>
           <p:nvPr/>
         </p:nvSpPr>
@@ -7014,7 +7152,7 @@
       </p:sp>
       <p:sp>
         <p:nvSpPr>
-          <p:cNvPr id="7" name="TextBox 6"/>
+          <p:cNvPr id="8" name="TextBox 7"/>
           <p:cNvSpPr txBox="1"/>
           <p:nvPr/>
         </p:nvSpPr>
@@ -7053,7 +7191,7 @@
       </p:sp>
       <p:sp>
         <p:nvSpPr>
-          <p:cNvPr id="8" name="TextBox 7"/>
+          <p:cNvPr id="9" name="TextBox 8"/>
           <p:cNvSpPr txBox="1"/>
           <p:nvPr/>
         </p:nvSpPr>
@@ -7092,7 +7230,7 @@
       </p:sp>
       <p:sp>
         <p:nvSpPr>
-          <p:cNvPr id="9" name="TextBox 8"/>
+          <p:cNvPr id="10" name="TextBox 9"/>
           <p:cNvSpPr txBox="1"/>
           <p:nvPr/>
         </p:nvSpPr>
@@ -7131,7 +7269,7 @@
       </p:sp>
       <p:sp>
         <p:nvSpPr>
-          <p:cNvPr id="10" name="TextBox 9"/>
+          <p:cNvPr id="11" name="TextBox 10"/>
           <p:cNvSpPr txBox="1"/>
           <p:nvPr/>
         </p:nvSpPr>
@@ -7170,7 +7308,7 @@
       </p:sp>
       <p:sp>
         <p:nvSpPr>
-          <p:cNvPr id="11" name="Rectangle 10"/>
+          <p:cNvPr id="12" name="Rectangle 11"/>
           <p:cNvSpPr/>
           <p:nvPr/>
         </p:nvSpPr>
@@ -7214,7 +7352,7 @@
       </p:sp>
       <p:sp>
         <p:nvSpPr>
-          <p:cNvPr id="12" name="TextBox 11"/>
+          <p:cNvPr id="13" name="TextBox 12"/>
           <p:cNvSpPr txBox="1"/>
           <p:nvPr/>
         </p:nvSpPr>
@@ -7253,7 +7391,7 @@
       </p:sp>
       <p:sp>
         <p:nvSpPr>
-          <p:cNvPr id="13" name="Rectangle 12"/>
+          <p:cNvPr id="14" name="Rectangle 13"/>
           <p:cNvSpPr/>
           <p:nvPr/>
         </p:nvSpPr>
@@ -7297,7 +7435,7 @@
       </p:sp>
       <p:sp>
         <p:nvSpPr>
-          <p:cNvPr id="14" name="TextBox 13"/>
+          <p:cNvPr id="15" name="TextBox 14"/>
           <p:cNvSpPr txBox="1"/>
           <p:nvPr/>
         </p:nvSpPr>
@@ -7394,7 +7532,46 @@
       <p:grpSpPr/>
       <p:sp>
         <p:nvSpPr>
-          <p:cNvPr id="2" name="Rectangle 1"/>
+          <p:cNvPr id="2" name="TextBox 1"/>
+          <p:cNvSpPr txBox="1"/>
+          <p:nvPr/>
+        </p:nvSpPr>
+        <p:spPr>
+          <a:xfrm>
+            <a:off x="11520000" y="6390000"/>
+            <a:ext cx="503999" cy="251999"/>
+          </a:xfrm>
+          <a:prstGeom prst="rect">
+            <a:avLst/>
+          </a:prstGeom>
+          <a:noFill/>
+        </p:spPr>
+        <p:txBody>
+          <a:bodyPr wrap="square">
+            <a:spAutoFit/>
+          </a:bodyPr>
+          <a:lstStyle/>
+          <a:p>
+            <a:pPr algn="r">
+              <a:lnSpc>
+                <a:spcPct val="125000"/>
+              </a:lnSpc>
+            </a:pPr>
+            <a:r>
+              <a:rPr sz="900" b="0">
+                <a:solidFill>
+                  <a:srgbClr val="6B6963"/>
+                </a:solidFill>
+                <a:latin typeface="Calibri"/>
+              </a:rPr>
+              <a:t>12</a:t>
+            </a:r>
+          </a:p>
+        </p:txBody>
+      </p:sp>
+      <p:sp>
+        <p:nvSpPr>
+          <p:cNvPr id="3" name="Rectangle 2"/>
           <p:cNvSpPr/>
           <p:nvPr/>
         </p:nvSpPr>
@@ -7438,7 +7615,7 @@
       </p:sp>
       <p:sp>
         <p:nvSpPr>
-          <p:cNvPr id="3" name="TextBox 2"/>
+          <p:cNvPr id="4" name="TextBox 3"/>
           <p:cNvSpPr txBox="1"/>
           <p:nvPr/>
         </p:nvSpPr>
@@ -7477,7 +7654,7 @@
       </p:sp>
       <p:sp>
         <p:nvSpPr>
-          <p:cNvPr id="4" name="TextBox 3"/>
+          <p:cNvPr id="5" name="TextBox 4"/>
           <p:cNvSpPr txBox="1"/>
           <p:nvPr/>
         </p:nvSpPr>
@@ -7516,7 +7693,7 @@
       </p:sp>
       <p:graphicFrame>
         <p:nvGraphicFramePr>
-          <p:cNvPr id="5" name="Table 4"/>
+          <p:cNvPr id="6" name="Table 5"/>
           <p:cNvGraphicFramePr>
             <a:graphicFrameLocks noGrp="1"/>
           </p:cNvGraphicFramePr>
@@ -7815,7 +7992,7 @@
       </p:graphicFrame>
       <p:sp>
         <p:nvSpPr>
-          <p:cNvPr id="6" name="TextBox 5"/>
+          <p:cNvPr id="7" name="TextBox 6"/>
           <p:cNvSpPr txBox="1"/>
           <p:nvPr/>
         </p:nvSpPr>
@@ -7854,7 +8031,7 @@
       </p:sp>
       <p:sp>
         <p:nvSpPr>
-          <p:cNvPr id="7" name="TextBox 6"/>
+          <p:cNvPr id="8" name="TextBox 7"/>
           <p:cNvSpPr txBox="1"/>
           <p:nvPr/>
         </p:nvSpPr>
@@ -7919,7 +8096,46 @@
       <p:grpSpPr/>
       <p:sp>
         <p:nvSpPr>
-          <p:cNvPr id="2" name="Rectangle 1"/>
+          <p:cNvPr id="2" name="TextBox 1"/>
+          <p:cNvSpPr txBox="1"/>
+          <p:nvPr/>
+        </p:nvSpPr>
+        <p:spPr>
+          <a:xfrm>
+            <a:off x="11520000" y="6390000"/>
+            <a:ext cx="503999" cy="251999"/>
+          </a:xfrm>
+          <a:prstGeom prst="rect">
+            <a:avLst/>
+          </a:prstGeom>
+          <a:noFill/>
+        </p:spPr>
+        <p:txBody>
+          <a:bodyPr wrap="square">
+            <a:spAutoFit/>
+          </a:bodyPr>
+          <a:lstStyle/>
+          <a:p>
+            <a:pPr algn="r">
+              <a:lnSpc>
+                <a:spcPct val="125000"/>
+              </a:lnSpc>
+            </a:pPr>
+            <a:r>
+              <a:rPr sz="900" b="0">
+                <a:solidFill>
+                  <a:srgbClr val="6B6963"/>
+                </a:solidFill>
+                <a:latin typeface="Calibri"/>
+              </a:rPr>
+              <a:t>13</a:t>
+            </a:r>
+          </a:p>
+        </p:txBody>
+      </p:sp>
+      <p:sp>
+        <p:nvSpPr>
+          <p:cNvPr id="3" name="Rectangle 2"/>
           <p:cNvSpPr/>
           <p:nvPr/>
         </p:nvSpPr>
@@ -7963,7 +8179,7 @@
       </p:sp>
       <p:sp>
         <p:nvSpPr>
-          <p:cNvPr id="3" name="TextBox 2"/>
+          <p:cNvPr id="4" name="TextBox 3"/>
           <p:cNvSpPr txBox="1"/>
           <p:nvPr/>
         </p:nvSpPr>
@@ -8002,7 +8218,7 @@
       </p:sp>
       <p:sp>
         <p:nvSpPr>
-          <p:cNvPr id="4" name="TextBox 3"/>
+          <p:cNvPr id="5" name="TextBox 4"/>
           <p:cNvSpPr txBox="1"/>
           <p:nvPr/>
         </p:nvSpPr>
@@ -8041,7 +8257,7 @@
       </p:sp>
       <p:sp>
         <p:nvSpPr>
-          <p:cNvPr id="5" name="TextBox 4"/>
+          <p:cNvPr id="6" name="TextBox 5"/>
           <p:cNvSpPr txBox="1"/>
           <p:nvPr/>
         </p:nvSpPr>
@@ -8080,7 +8296,7 @@
       </p:sp>
       <p:sp>
         <p:nvSpPr>
-          <p:cNvPr id="6" name="TextBox 5"/>
+          <p:cNvPr id="7" name="TextBox 6"/>
           <p:cNvSpPr txBox="1"/>
           <p:nvPr/>
         </p:nvSpPr>
@@ -8135,7 +8351,7 @@
       </p:sp>
       <p:sp>
         <p:nvSpPr>
-          <p:cNvPr id="7" name="TextBox 6"/>
+          <p:cNvPr id="8" name="TextBox 7"/>
           <p:cNvSpPr txBox="1"/>
           <p:nvPr/>
         </p:nvSpPr>
@@ -8174,7 +8390,7 @@
       </p:sp>
       <p:sp>
         <p:nvSpPr>
-          <p:cNvPr id="8" name="TextBox 7"/>
+          <p:cNvPr id="9" name="TextBox 8"/>
           <p:cNvSpPr txBox="1"/>
           <p:nvPr/>
         </p:nvSpPr>
@@ -8213,7 +8429,7 @@
       </p:sp>
       <p:sp>
         <p:nvSpPr>
-          <p:cNvPr id="9" name="TextBox 8"/>
+          <p:cNvPr id="10" name="TextBox 9"/>
           <p:cNvSpPr txBox="1"/>
           <p:nvPr/>
         </p:nvSpPr>
@@ -8252,7 +8468,7 @@
       </p:sp>
       <p:sp>
         <p:nvSpPr>
-          <p:cNvPr id="10" name="TextBox 9"/>
+          <p:cNvPr id="11" name="TextBox 10"/>
           <p:cNvSpPr txBox="1"/>
           <p:nvPr/>
         </p:nvSpPr>
@@ -8291,7 +8507,7 @@
       </p:sp>
       <p:sp>
         <p:nvSpPr>
-          <p:cNvPr id="11" name="TextBox 10"/>
+          <p:cNvPr id="12" name="TextBox 11"/>
           <p:cNvSpPr txBox="1"/>
           <p:nvPr/>
         </p:nvSpPr>
@@ -8330,7 +8546,7 @@
       </p:sp>
       <p:sp>
         <p:nvSpPr>
-          <p:cNvPr id="12" name="TextBox 11"/>
+          <p:cNvPr id="13" name="TextBox 12"/>
           <p:cNvSpPr txBox="1"/>
           <p:nvPr/>
         </p:nvSpPr>
@@ -8395,7 +8611,46 @@
       <p:grpSpPr/>
       <p:sp>
         <p:nvSpPr>
-          <p:cNvPr id="2" name="Rectangle 1"/>
+          <p:cNvPr id="2" name="TextBox 1"/>
+          <p:cNvSpPr txBox="1"/>
+          <p:nvPr/>
+        </p:nvSpPr>
+        <p:spPr>
+          <a:xfrm>
+            <a:off x="11520000" y="6390000"/>
+            <a:ext cx="503999" cy="251999"/>
+          </a:xfrm>
+          <a:prstGeom prst="rect">
+            <a:avLst/>
+          </a:prstGeom>
+          <a:noFill/>
+        </p:spPr>
+        <p:txBody>
+          <a:bodyPr wrap="square">
+            <a:spAutoFit/>
+          </a:bodyPr>
+          <a:lstStyle/>
+          <a:p>
+            <a:pPr algn="r">
+              <a:lnSpc>
+                <a:spcPct val="125000"/>
+              </a:lnSpc>
+            </a:pPr>
+            <a:r>
+              <a:rPr sz="900" b="0">
+                <a:solidFill>
+                  <a:srgbClr val="6B6963"/>
+                </a:solidFill>
+                <a:latin typeface="Calibri"/>
+              </a:rPr>
+              <a:t>14</a:t>
+            </a:r>
+          </a:p>
+        </p:txBody>
+      </p:sp>
+      <p:sp>
+        <p:nvSpPr>
+          <p:cNvPr id="3" name="Rectangle 2"/>
           <p:cNvSpPr/>
           <p:nvPr/>
         </p:nvSpPr>
@@ -8439,7 +8694,7 @@
       </p:sp>
       <p:sp>
         <p:nvSpPr>
-          <p:cNvPr id="3" name="TextBox 2"/>
+          <p:cNvPr id="4" name="TextBox 3"/>
           <p:cNvSpPr txBox="1"/>
           <p:nvPr/>
         </p:nvSpPr>
@@ -8478,7 +8733,7 @@
       </p:sp>
       <p:sp>
         <p:nvSpPr>
-          <p:cNvPr id="4" name="TextBox 3"/>
+          <p:cNvPr id="5" name="TextBox 4"/>
           <p:cNvSpPr txBox="1"/>
           <p:nvPr/>
         </p:nvSpPr>
@@ -8517,7 +8772,7 @@
       </p:sp>
       <p:sp>
         <p:nvSpPr>
-          <p:cNvPr id="5" name="TextBox 4"/>
+          <p:cNvPr id="6" name="TextBox 5"/>
           <p:cNvSpPr txBox="1"/>
           <p:nvPr/>
         </p:nvSpPr>
@@ -8556,7 +8811,7 @@
       </p:sp>
       <p:sp>
         <p:nvSpPr>
-          <p:cNvPr id="6" name="TextBox 5"/>
+          <p:cNvPr id="7" name="TextBox 6"/>
           <p:cNvSpPr txBox="1"/>
           <p:nvPr/>
         </p:nvSpPr>
@@ -8595,7 +8850,7 @@
       </p:sp>
       <p:sp>
         <p:nvSpPr>
-          <p:cNvPr id="7" name="TextBox 6"/>
+          <p:cNvPr id="8" name="TextBox 7"/>
           <p:cNvSpPr txBox="1"/>
           <p:nvPr/>
         </p:nvSpPr>
@@ -8634,7 +8889,7 @@
       </p:sp>
       <p:sp>
         <p:nvSpPr>
-          <p:cNvPr id="8" name="TextBox 7"/>
+          <p:cNvPr id="9" name="TextBox 8"/>
           <p:cNvSpPr txBox="1"/>
           <p:nvPr/>
         </p:nvSpPr>
@@ -8673,7 +8928,7 @@
       </p:sp>
       <p:sp>
         <p:nvSpPr>
-          <p:cNvPr id="9" name="Rectangle 8"/>
+          <p:cNvPr id="10" name="Rectangle 9"/>
           <p:cNvSpPr/>
           <p:nvPr/>
         </p:nvSpPr>
@@ -8717,7 +8972,7 @@
       </p:sp>
       <p:sp>
         <p:nvSpPr>
-          <p:cNvPr id="10" name="TextBox 9"/>
+          <p:cNvPr id="11" name="TextBox 10"/>
           <p:cNvSpPr txBox="1"/>
           <p:nvPr/>
         </p:nvSpPr>
@@ -8750,89 +9005,6 @@
                 <a:latin typeface="Calibri"/>
               </a:rPr>
               <a:t>C'est le point de méthode le plus important de cette partie. Un bootstrap ligne à ligne donne des intervalles beaucoup trop étroits, et fait conclure à des différences qui n'existent pas. Le terme consacré est la pseudo-réplication.</a:t>
-            </a:r>
-          </a:p>
-        </p:txBody>
-      </p:sp>
-      <p:sp>
-        <p:nvSpPr>
-          <p:cNvPr id="11" name="Rectangle 10"/>
-          <p:cNvSpPr/>
-          <p:nvPr/>
-        </p:nvSpPr>
-        <p:spPr>
-          <a:xfrm>
-            <a:off x="684000" y="5544000"/>
-            <a:ext cx="39600" cy="1152000"/>
-          </a:xfrm>
-          <a:prstGeom prst="rect">
-            <a:avLst/>
-          </a:prstGeom>
-          <a:solidFill>
-            <a:srgbClr val="C3C2B7"/>
-          </a:solidFill>
-          <a:ln>
-            <a:noFill/>
-          </a:ln>
-          <a:effectLst/>
-        </p:spPr>
-        <p:style>
-          <a:lnRef idx="1">
-            <a:schemeClr val="accent1"/>
-          </a:lnRef>
-          <a:fillRef idx="3">
-            <a:schemeClr val="accent1"/>
-          </a:fillRef>
-          <a:effectRef idx="2">
-            <a:schemeClr val="accent1"/>
-          </a:effectRef>
-          <a:fontRef idx="minor">
-            <a:schemeClr val="lt1"/>
-          </a:fontRef>
-        </p:style>
-        <p:txBody>
-          <a:bodyPr rtlCol="0" anchor="ctr"/>
-          <a:lstStyle/>
-          <a:p>
-            <a:pPr algn="ctr"/>
-          </a:p>
-        </p:txBody>
-      </p:sp>
-      <p:sp>
-        <p:nvSpPr>
-          <p:cNvPr id="12" name="TextBox 11"/>
-          <p:cNvSpPr txBox="1"/>
-          <p:nvPr/>
-        </p:nvSpPr>
-        <p:spPr>
-          <a:xfrm>
-            <a:off x="882000" y="5580000"/>
-            <a:ext cx="10548000" cy="1152000"/>
-          </a:xfrm>
-          <a:prstGeom prst="rect">
-            <a:avLst/>
-          </a:prstGeom>
-          <a:noFill/>
-        </p:spPr>
-        <p:txBody>
-          <a:bodyPr wrap="square">
-            <a:spAutoFit/>
-          </a:bodyPr>
-          <a:lstStyle/>
-          <a:p>
-            <a:pPr>
-              <a:lnSpc>
-                <a:spcPct val="130000"/>
-              </a:lnSpc>
-            </a:pPr>
-            <a:r>
-              <a:rPr sz="1400" b="0">
-                <a:solidFill>
-                  <a:srgbClr val="0B0B0B"/>
-                </a:solidFill>
-                <a:latin typeface="Calibri"/>
-              </a:rPr>
-              <a:t>Détail d'implémentation : la moyenne pondérée des précisions est recalculée par tri unique puis sommes cumulées, au lieu d'appeler scikit-learn 200 fois. Le résultat est identique à 1e-12 près, et la comparaison complète tient en quelques minutes au lieu de plusieurs heures.</a:t>
             </a:r>
           </a:p>
         </p:txBody>
@@ -8865,7 +9037,46 @@
       <p:grpSpPr/>
       <p:sp>
         <p:nvSpPr>
-          <p:cNvPr id="2" name="Rectangle 1"/>
+          <p:cNvPr id="2" name="TextBox 1"/>
+          <p:cNvSpPr txBox="1"/>
+          <p:nvPr/>
+        </p:nvSpPr>
+        <p:spPr>
+          <a:xfrm>
+            <a:off x="11520000" y="6390000"/>
+            <a:ext cx="503999" cy="251999"/>
+          </a:xfrm>
+          <a:prstGeom prst="rect">
+            <a:avLst/>
+          </a:prstGeom>
+          <a:noFill/>
+        </p:spPr>
+        <p:txBody>
+          <a:bodyPr wrap="square">
+            <a:spAutoFit/>
+          </a:bodyPr>
+          <a:lstStyle/>
+          <a:p>
+            <a:pPr algn="r">
+              <a:lnSpc>
+                <a:spcPct val="125000"/>
+              </a:lnSpc>
+            </a:pPr>
+            <a:r>
+              <a:rPr sz="900" b="0">
+                <a:solidFill>
+                  <a:srgbClr val="6B6963"/>
+                </a:solidFill>
+                <a:latin typeface="Calibri"/>
+              </a:rPr>
+              <a:t>15</a:t>
+            </a:r>
+          </a:p>
+        </p:txBody>
+      </p:sp>
+      <p:sp>
+        <p:nvSpPr>
+          <p:cNvPr id="3" name="Rectangle 2"/>
           <p:cNvSpPr/>
           <p:nvPr/>
         </p:nvSpPr>
@@ -8909,7 +9120,7 @@
       </p:sp>
       <p:sp>
         <p:nvSpPr>
-          <p:cNvPr id="3" name="TextBox 2"/>
+          <p:cNvPr id="4" name="TextBox 3"/>
           <p:cNvSpPr txBox="1"/>
           <p:nvPr/>
         </p:nvSpPr>
@@ -8948,7 +9159,7 @@
       </p:sp>
       <p:sp>
         <p:nvSpPr>
-          <p:cNvPr id="4" name="TextBox 3"/>
+          <p:cNvPr id="5" name="TextBox 4"/>
           <p:cNvSpPr txBox="1"/>
           <p:nvPr/>
         </p:nvSpPr>
@@ -8987,7 +9198,7 @@
       </p:sp>
       <p:graphicFrame>
         <p:nvGraphicFramePr>
-          <p:cNvPr id="5" name="Table 4"/>
+          <p:cNvPr id="6" name="Table 5"/>
           <p:cNvGraphicFramePr>
             <a:graphicFrameLocks noGrp="1"/>
           </p:cNvGraphicFramePr>
@@ -9590,6 +9801,45 @@
         </p:nvSpPr>
         <p:spPr>
           <a:xfrm>
+            <a:off x="11520000" y="6390000"/>
+            <a:ext cx="503999" cy="251999"/>
+          </a:xfrm>
+          <a:prstGeom prst="rect">
+            <a:avLst/>
+          </a:prstGeom>
+          <a:noFill/>
+        </p:spPr>
+        <p:txBody>
+          <a:bodyPr wrap="square">
+            <a:spAutoFit/>
+          </a:bodyPr>
+          <a:lstStyle/>
+          <a:p>
+            <a:pPr algn="r">
+              <a:lnSpc>
+                <a:spcPct val="125000"/>
+              </a:lnSpc>
+            </a:pPr>
+            <a:r>
+              <a:rPr sz="900" b="0">
+                <a:solidFill>
+                  <a:srgbClr val="C3C2B7"/>
+                </a:solidFill>
+                <a:latin typeface="Calibri"/>
+              </a:rPr>
+              <a:t>16</a:t>
+            </a:r>
+          </a:p>
+        </p:txBody>
+      </p:sp>
+      <p:sp>
+        <p:nvSpPr>
+          <p:cNvPr id="3" name="TextBox 2"/>
+          <p:cNvSpPr txBox="1"/>
+          <p:nvPr/>
+        </p:nvSpPr>
+        <p:spPr>
+          <a:xfrm>
             <a:off x="684000" y="2268000"/>
             <a:ext cx="2160000" cy="503999"/>
           </a:xfrm>
@@ -9623,7 +9873,7 @@
       </p:sp>
       <p:sp>
         <p:nvSpPr>
-          <p:cNvPr id="3" name="TextBox 2"/>
+          <p:cNvPr id="4" name="TextBox 3"/>
           <p:cNvSpPr txBox="1"/>
           <p:nvPr/>
         </p:nvSpPr>
@@ -9662,7 +9912,7 @@
       </p:sp>
       <p:sp>
         <p:nvSpPr>
-          <p:cNvPr id="4" name="TextBox 3"/>
+          <p:cNvPr id="5" name="TextBox 4"/>
           <p:cNvSpPr txBox="1"/>
           <p:nvPr/>
         </p:nvSpPr>
@@ -9727,7 +9977,46 @@
       <p:grpSpPr/>
       <p:sp>
         <p:nvSpPr>
-          <p:cNvPr id="2" name="Rectangle 1"/>
+          <p:cNvPr id="2" name="TextBox 1"/>
+          <p:cNvSpPr txBox="1"/>
+          <p:nvPr/>
+        </p:nvSpPr>
+        <p:spPr>
+          <a:xfrm>
+            <a:off x="11520000" y="6390000"/>
+            <a:ext cx="503999" cy="251999"/>
+          </a:xfrm>
+          <a:prstGeom prst="rect">
+            <a:avLst/>
+          </a:prstGeom>
+          <a:noFill/>
+        </p:spPr>
+        <p:txBody>
+          <a:bodyPr wrap="square">
+            <a:spAutoFit/>
+          </a:bodyPr>
+          <a:lstStyle/>
+          <a:p>
+            <a:pPr algn="r">
+              <a:lnSpc>
+                <a:spcPct val="125000"/>
+              </a:lnSpc>
+            </a:pPr>
+            <a:r>
+              <a:rPr sz="900" b="0">
+                <a:solidFill>
+                  <a:srgbClr val="6B6963"/>
+                </a:solidFill>
+                <a:latin typeface="Calibri"/>
+              </a:rPr>
+              <a:t>17</a:t>
+            </a:r>
+          </a:p>
+        </p:txBody>
+      </p:sp>
+      <p:sp>
+        <p:nvSpPr>
+          <p:cNvPr id="3" name="Rectangle 2"/>
           <p:cNvSpPr/>
           <p:nvPr/>
         </p:nvSpPr>
@@ -9771,7 +10060,7 @@
       </p:sp>
       <p:sp>
         <p:nvSpPr>
-          <p:cNvPr id="3" name="TextBox 2"/>
+          <p:cNvPr id="4" name="TextBox 3"/>
           <p:cNvSpPr txBox="1"/>
           <p:nvPr/>
         </p:nvSpPr>
@@ -9810,7 +10099,7 @@
       </p:sp>
       <p:sp>
         <p:nvSpPr>
-          <p:cNvPr id="4" name="TextBox 3"/>
+          <p:cNvPr id="5" name="TextBox 4"/>
           <p:cNvSpPr txBox="1"/>
           <p:nvPr/>
         </p:nvSpPr>
@@ -9849,7 +10138,7 @@
       </p:sp>
       <p:graphicFrame>
         <p:nvGraphicFramePr>
-          <p:cNvPr id="5" name="Table 4"/>
+          <p:cNvPr id="6" name="Table 5"/>
           <p:cNvGraphicFramePr>
             <a:graphicFrameLocks noGrp="1"/>
           </p:cNvGraphicFramePr>
@@ -9857,7 +10146,7 @@
         </p:nvGraphicFramePr>
         <p:xfrm>
           <a:off x="684000" y="1944000"/>
-          <a:ext cx="9000000" cy="2376000"/>
+          <a:ext cx="9000000" cy="1728000"/>
         </p:xfrm>
         <a:graphic>
           <a:graphicData uri="http://schemas.openxmlformats.org/drawingml/2006/table">
@@ -9870,7 +10159,7 @@
                 <a:gridCol w="1800000"/>
                 <a:gridCol w="1800000"/>
               </a:tblGrid>
-              <a:tr h="396000">
+              <a:tr h="288000">
                 <a:tc>
                   <a:txBody>
                     <a:bodyPr/>
@@ -9938,7 +10227,7 @@
                   </a:tcPr>
                 </a:tc>
               </a:tr>
-              <a:tr h="396000">
+              <a:tr h="288000">
                 <a:tc>
                   <a:txBody>
                     <a:bodyPr/>
@@ -10006,7 +10295,7 @@
                   </a:tcPr>
                 </a:tc>
               </a:tr>
-              <a:tr h="396000">
+              <a:tr h="288000">
                 <a:tc>
                   <a:txBody>
                     <a:bodyPr/>
@@ -10074,7 +10363,7 @@
                   </a:tcPr>
                 </a:tc>
               </a:tr>
-              <a:tr h="396000">
+              <a:tr h="288000">
                 <a:tc>
                   <a:txBody>
                     <a:bodyPr/>
@@ -10142,7 +10431,7 @@
                   </a:tcPr>
                 </a:tc>
               </a:tr>
-              <a:tr h="396000">
+              <a:tr h="288000">
                 <a:tc>
                   <a:txBody>
                     <a:bodyPr/>
@@ -10210,7 +10499,7 @@
                   </a:tcPr>
                 </a:tc>
               </a:tr>
-              <a:tr h="396000">
+              <a:tr h="288000">
                 <a:tc>
                   <a:txBody>
                     <a:bodyPr/>
@@ -10284,14 +10573,14 @@
       </p:graphicFrame>
       <p:sp>
         <p:nvSpPr>
-          <p:cNvPr id="6" name="Rectangle 5"/>
+          <p:cNvPr id="7" name="Rectangle 6"/>
           <p:cNvSpPr/>
           <p:nvPr/>
         </p:nvSpPr>
         <p:spPr>
           <a:xfrm>
-            <a:off x="684000" y="4608000"/>
-            <a:ext cx="39600" cy="1080000"/>
+            <a:off x="684000" y="3851999"/>
+            <a:ext cx="39600" cy="792000"/>
           </a:xfrm>
           <a:prstGeom prst="rect">
             <a:avLst/>
@@ -10328,14 +10617,14 @@
       </p:sp>
       <p:sp>
         <p:nvSpPr>
-          <p:cNvPr id="7" name="TextBox 6"/>
+          <p:cNvPr id="8" name="TextBox 7"/>
           <p:cNvSpPr txBox="1"/>
           <p:nvPr/>
         </p:nvSpPr>
         <p:spPr>
           <a:xfrm>
-            <a:off x="882000" y="4644000"/>
-            <a:ext cx="10548000" cy="1080000"/>
+            <a:off x="882000" y="3887999"/>
+            <a:ext cx="10548000" cy="792000"/>
           </a:xfrm>
           <a:prstGeom prst="rect">
             <a:avLst/>
@@ -10354,33 +10643,41 @@
               </a:lnSpc>
             </a:pPr>
             <a:r>
-              <a:rPr sz="1500" b="0">
+              <a:rPr sz="1400" b="0">
                 <a:solidFill>
                   <a:srgbClr val="0B0B0B"/>
                 </a:solidFill>
                 <a:latin typeface="Calibri"/>
               </a:rPr>
-              <a:t>L'historique spatial seul vaut déjà ×19, la météo seule ×5, et leur croisement ×42.</a:t>
-            </a:r>
-          </a:p>
-          <a:p>
-            <a:pPr>
-              <a:lnSpc>
-                <a:spcPct val="130000"/>
-              </a:lnSpc>
-            </a:pPr>
-            <a:r>
-              <a:rPr sz="1500" b="0">
-                <a:solidFill>
-                  <a:srgbClr val="0B0B0B"/>
-                </a:solidFill>
-                <a:latin typeface="Calibri"/>
-              </a:rPr>
-              <a:t>C'est la barre à battre, et non le hasard. Un modèle à ×30 serait moins bon qu'une règle de trois, tout en paraissant excellent.</a:t>
-            </a:r>
-          </a:p>
-        </p:txBody>
-      </p:sp>
+              <a:t>L'historique spatial seul vaut déjà ×19, la météo seule ×5, et leur croisement ×42. C'est la barre à battre, et non le hasard : un modèle à ×30 serait moins bon qu'une règle de trois, tout en paraissant excellent.</a:t>
+            </a:r>
+          </a:p>
+        </p:txBody>
+      </p:sp>
+      <p:pic>
+        <p:nvPicPr>
+          <p:cNvPr id="9" name="Picture 8" descr="07_baseline-2-ce-que-le-danger-effis-predit-a-lui-seul.png"/>
+          <p:cNvPicPr>
+            <a:picLocks noChangeAspect="1"/>
+          </p:cNvPicPr>
+          <p:nvPr/>
+        </p:nvPicPr>
+        <p:blipFill>
+          <a:blip r:embed="rId2"/>
+          <a:stretch>
+            <a:fillRect/>
+          </a:stretch>
+        </p:blipFill>
+        <p:spPr>
+          <a:xfrm>
+            <a:off x="2586261" y="4788000"/>
+            <a:ext cx="6995476" cy="1944000"/>
+          </a:xfrm>
+          <a:prstGeom prst="rect">
+            <a:avLst/>
+          </a:prstGeom>
+        </p:spPr>
+      </p:pic>
     </p:spTree>
   </p:cSld>
   <p:clrMapOvr>
@@ -10409,7 +10706,46 @@
       <p:grpSpPr/>
       <p:sp>
         <p:nvSpPr>
-          <p:cNvPr id="2" name="Rectangle 1"/>
+          <p:cNvPr id="2" name="TextBox 1"/>
+          <p:cNvSpPr txBox="1"/>
+          <p:nvPr/>
+        </p:nvSpPr>
+        <p:spPr>
+          <a:xfrm>
+            <a:off x="11520000" y="6390000"/>
+            <a:ext cx="503999" cy="251999"/>
+          </a:xfrm>
+          <a:prstGeom prst="rect">
+            <a:avLst/>
+          </a:prstGeom>
+          <a:noFill/>
+        </p:spPr>
+        <p:txBody>
+          <a:bodyPr wrap="square">
+            <a:spAutoFit/>
+          </a:bodyPr>
+          <a:lstStyle/>
+          <a:p>
+            <a:pPr algn="r">
+              <a:lnSpc>
+                <a:spcPct val="125000"/>
+              </a:lnSpc>
+            </a:pPr>
+            <a:r>
+              <a:rPr sz="900" b="0">
+                <a:solidFill>
+                  <a:srgbClr val="6B6963"/>
+                </a:solidFill>
+                <a:latin typeface="Calibri"/>
+              </a:rPr>
+              <a:t>18</a:t>
+            </a:r>
+          </a:p>
+        </p:txBody>
+      </p:sp>
+      <p:sp>
+        <p:nvSpPr>
+          <p:cNvPr id="3" name="Rectangle 2"/>
           <p:cNvSpPr/>
           <p:nvPr/>
         </p:nvSpPr>
@@ -10453,7 +10789,7 @@
       </p:sp>
       <p:sp>
         <p:nvSpPr>
-          <p:cNvPr id="3" name="TextBox 2"/>
+          <p:cNvPr id="4" name="TextBox 3"/>
           <p:cNvSpPr txBox="1"/>
           <p:nvPr/>
         </p:nvSpPr>
@@ -10492,7 +10828,7 @@
       </p:sp>
       <p:sp>
         <p:nvSpPr>
-          <p:cNvPr id="4" name="TextBox 3"/>
+          <p:cNvPr id="5" name="TextBox 4"/>
           <p:cNvSpPr txBox="1"/>
           <p:nvPr/>
         </p:nvSpPr>
@@ -10531,7 +10867,7 @@
       </p:sp>
       <p:pic>
         <p:nvPicPr>
-          <p:cNvPr id="5" name="Picture 4" descr="02_le-lissage-bayesien-rendre-une-estimation-aux-communes-sans.png"/>
+          <p:cNvPr id="6" name="Picture 5" descr="02_le-lissage-bayesien-rendre-une-estimation-aux-communes-sans.png"/>
           <p:cNvPicPr>
             <a:picLocks noChangeAspect="1"/>
           </p:cNvPicPr>
@@ -10555,7 +10891,7 @@
       </p:pic>
       <p:sp>
         <p:nvSpPr>
-          <p:cNvPr id="6" name="TextBox 5"/>
+          <p:cNvPr id="7" name="TextBox 6"/>
           <p:cNvSpPr txBox="1"/>
           <p:nvPr/>
         </p:nvSpPr>
@@ -10594,7 +10930,7 @@
       </p:sp>
       <p:sp>
         <p:nvSpPr>
-          <p:cNvPr id="7" name="TextBox 6"/>
+          <p:cNvPr id="8" name="TextBox 7"/>
           <p:cNvSpPr txBox="1"/>
           <p:nvPr/>
         </p:nvSpPr>
@@ -10633,7 +10969,7 @@
       </p:sp>
       <p:sp>
         <p:nvSpPr>
-          <p:cNvPr id="8" name="TextBox 7"/>
+          <p:cNvPr id="9" name="TextBox 8"/>
           <p:cNvSpPr txBox="1"/>
           <p:nvPr/>
         </p:nvSpPr>
@@ -10672,7 +11008,7 @@
       </p:sp>
       <p:sp>
         <p:nvSpPr>
-          <p:cNvPr id="9" name="TextBox 8"/>
+          <p:cNvPr id="10" name="TextBox 9"/>
           <p:cNvSpPr txBox="1"/>
           <p:nvPr/>
         </p:nvSpPr>
@@ -10711,7 +11047,7 @@
       </p:sp>
       <p:sp>
         <p:nvSpPr>
-          <p:cNvPr id="10" name="TextBox 9"/>
+          <p:cNvPr id="11" name="TextBox 10"/>
           <p:cNvSpPr txBox="1"/>
           <p:nvPr/>
         </p:nvSpPr>
@@ -10750,7 +11086,7 @@
       </p:sp>
       <p:sp>
         <p:nvSpPr>
-          <p:cNvPr id="11" name="TextBox 10"/>
+          <p:cNvPr id="12" name="TextBox 11"/>
           <p:cNvSpPr txBox="1"/>
           <p:nvPr/>
         </p:nvSpPr>
@@ -10815,7 +11151,46 @@
       <p:grpSpPr/>
       <p:sp>
         <p:nvSpPr>
-          <p:cNvPr id="2" name="Rectangle 1"/>
+          <p:cNvPr id="2" name="TextBox 1"/>
+          <p:cNvSpPr txBox="1"/>
+          <p:nvPr/>
+        </p:nvSpPr>
+        <p:spPr>
+          <a:xfrm>
+            <a:off x="11520000" y="6390000"/>
+            <a:ext cx="503999" cy="251999"/>
+          </a:xfrm>
+          <a:prstGeom prst="rect">
+            <a:avLst/>
+          </a:prstGeom>
+          <a:noFill/>
+        </p:spPr>
+        <p:txBody>
+          <a:bodyPr wrap="square">
+            <a:spAutoFit/>
+          </a:bodyPr>
+          <a:lstStyle/>
+          <a:p>
+            <a:pPr algn="r">
+              <a:lnSpc>
+                <a:spcPct val="125000"/>
+              </a:lnSpc>
+            </a:pPr>
+            <a:r>
+              <a:rPr sz="900" b="0">
+                <a:solidFill>
+                  <a:srgbClr val="6B6963"/>
+                </a:solidFill>
+                <a:latin typeface="Calibri"/>
+              </a:rPr>
+              <a:t>19</a:t>
+            </a:r>
+          </a:p>
+        </p:txBody>
+      </p:sp>
+      <p:sp>
+        <p:nvSpPr>
+          <p:cNvPr id="3" name="Rectangle 2"/>
           <p:cNvSpPr/>
           <p:nvPr/>
         </p:nvSpPr>
@@ -10859,7 +11234,7 @@
       </p:sp>
       <p:sp>
         <p:nvSpPr>
-          <p:cNvPr id="3" name="TextBox 2"/>
+          <p:cNvPr id="4" name="TextBox 3"/>
           <p:cNvSpPr txBox="1"/>
           <p:nvPr/>
         </p:nvSpPr>
@@ -10898,7 +11273,7 @@
       </p:sp>
       <p:sp>
         <p:nvSpPr>
-          <p:cNvPr id="4" name="TextBox 3"/>
+          <p:cNvPr id="5" name="TextBox 4"/>
           <p:cNvSpPr txBox="1"/>
           <p:nvPr/>
         </p:nvSpPr>
@@ -10937,7 +11312,7 @@
       </p:sp>
       <p:graphicFrame>
         <p:nvGraphicFramePr>
-          <p:cNvPr id="5" name="Table 4"/>
+          <p:cNvPr id="6" name="Table 5"/>
           <p:cNvGraphicFramePr>
             <a:graphicFrameLocks noGrp="1"/>
           </p:cNvGraphicFramePr>
@@ -11505,7 +11880,7 @@
       </p:graphicFrame>
       <p:sp>
         <p:nvSpPr>
-          <p:cNvPr id="6" name="TextBox 5"/>
+          <p:cNvPr id="7" name="TextBox 6"/>
           <p:cNvSpPr txBox="1"/>
           <p:nvPr/>
         </p:nvSpPr>
@@ -11544,7 +11919,7 @@
       </p:sp>
       <p:sp>
         <p:nvSpPr>
-          <p:cNvPr id="7" name="Rectangle 6"/>
+          <p:cNvPr id="8" name="Rectangle 7"/>
           <p:cNvSpPr/>
           <p:nvPr/>
         </p:nvSpPr>
@@ -11588,7 +11963,7 @@
       </p:sp>
       <p:sp>
         <p:nvSpPr>
-          <p:cNvPr id="8" name="TextBox 7"/>
+          <p:cNvPr id="9" name="TextBox 8"/>
           <p:cNvSpPr txBox="1"/>
           <p:nvPr/>
         </p:nvSpPr>
@@ -11659,6 +12034,45 @@
         </p:nvSpPr>
         <p:spPr>
           <a:xfrm>
+            <a:off x="11520000" y="6390000"/>
+            <a:ext cx="503999" cy="251999"/>
+          </a:xfrm>
+          <a:prstGeom prst="rect">
+            <a:avLst/>
+          </a:prstGeom>
+          <a:noFill/>
+        </p:spPr>
+        <p:txBody>
+          <a:bodyPr wrap="square">
+            <a:spAutoFit/>
+          </a:bodyPr>
+          <a:lstStyle/>
+          <a:p>
+            <a:pPr algn="r">
+              <a:lnSpc>
+                <a:spcPct val="125000"/>
+              </a:lnSpc>
+            </a:pPr>
+            <a:r>
+              <a:rPr sz="900" b="0">
+                <a:solidFill>
+                  <a:srgbClr val="C3C2B7"/>
+                </a:solidFill>
+                <a:latin typeface="Calibri"/>
+              </a:rPr>
+              <a:t>2</a:t>
+            </a:r>
+          </a:p>
+        </p:txBody>
+      </p:sp>
+      <p:sp>
+        <p:nvSpPr>
+          <p:cNvPr id="3" name="TextBox 2"/>
+          <p:cNvSpPr txBox="1"/>
+          <p:nvPr/>
+        </p:nvSpPr>
+        <p:spPr>
+          <a:xfrm>
             <a:off x="684000" y="2268000"/>
             <a:ext cx="2160000" cy="503999"/>
           </a:xfrm>
@@ -11692,7 +12106,7 @@
       </p:sp>
       <p:sp>
         <p:nvSpPr>
-          <p:cNvPr id="3" name="TextBox 2"/>
+          <p:cNvPr id="4" name="TextBox 3"/>
           <p:cNvSpPr txBox="1"/>
           <p:nvPr/>
         </p:nvSpPr>
@@ -11731,7 +12145,7 @@
       </p:sp>
       <p:sp>
         <p:nvSpPr>
-          <p:cNvPr id="4" name="TextBox 3"/>
+          <p:cNvPr id="5" name="TextBox 4"/>
           <p:cNvSpPr txBox="1"/>
           <p:nvPr/>
         </p:nvSpPr>
@@ -11796,7 +12210,46 @@
       <p:grpSpPr/>
       <p:sp>
         <p:nvSpPr>
-          <p:cNvPr id="2" name="Rectangle 1"/>
+          <p:cNvPr id="2" name="TextBox 1"/>
+          <p:cNvSpPr txBox="1"/>
+          <p:nvPr/>
+        </p:nvSpPr>
+        <p:spPr>
+          <a:xfrm>
+            <a:off x="11520000" y="6390000"/>
+            <a:ext cx="503999" cy="251999"/>
+          </a:xfrm>
+          <a:prstGeom prst="rect">
+            <a:avLst/>
+          </a:prstGeom>
+          <a:noFill/>
+        </p:spPr>
+        <p:txBody>
+          <a:bodyPr wrap="square">
+            <a:spAutoFit/>
+          </a:bodyPr>
+          <a:lstStyle/>
+          <a:p>
+            <a:pPr algn="r">
+              <a:lnSpc>
+                <a:spcPct val="125000"/>
+              </a:lnSpc>
+            </a:pPr>
+            <a:r>
+              <a:rPr sz="900" b="0">
+                <a:solidFill>
+                  <a:srgbClr val="6B6963"/>
+                </a:solidFill>
+                <a:latin typeface="Calibri"/>
+              </a:rPr>
+              <a:t>20</a:t>
+            </a:r>
+          </a:p>
+        </p:txBody>
+      </p:sp>
+      <p:sp>
+        <p:nvSpPr>
+          <p:cNvPr id="3" name="Rectangle 2"/>
           <p:cNvSpPr/>
           <p:nvPr/>
         </p:nvSpPr>
@@ -11840,7 +12293,7 @@
       </p:sp>
       <p:sp>
         <p:nvSpPr>
-          <p:cNvPr id="3" name="TextBox 2"/>
+          <p:cNvPr id="4" name="TextBox 3"/>
           <p:cNvSpPr txBox="1"/>
           <p:nvPr/>
         </p:nvSpPr>
@@ -11879,7 +12332,7 @@
       </p:sp>
       <p:sp>
         <p:nvSpPr>
-          <p:cNvPr id="4" name="TextBox 3"/>
+          <p:cNvPr id="5" name="TextBox 4"/>
           <p:cNvSpPr txBox="1"/>
           <p:nvPr/>
         </p:nvSpPr>
@@ -11918,7 +12371,7 @@
       </p:sp>
       <p:pic>
         <p:nvPicPr>
-          <p:cNvPr id="5" name="Picture 4" descr="modeles.png"/>
+          <p:cNvPr id="6" name="Picture 5" descr="modeles.png"/>
           <p:cNvPicPr>
             <a:picLocks noChangeAspect="1"/>
           </p:cNvPicPr>
@@ -11942,7 +12395,7 @@
       </p:pic>
       <p:sp>
         <p:nvSpPr>
-          <p:cNvPr id="6" name="Rectangle 5"/>
+          <p:cNvPr id="7" name="Rectangle 6"/>
           <p:cNvSpPr/>
           <p:nvPr/>
         </p:nvSpPr>
@@ -11986,7 +12439,7 @@
       </p:sp>
       <p:sp>
         <p:nvSpPr>
-          <p:cNvPr id="7" name="TextBox 6"/>
+          <p:cNvPr id="8" name="TextBox 7"/>
           <p:cNvSpPr txBox="1"/>
           <p:nvPr/>
         </p:nvSpPr>
@@ -12067,7 +12520,46 @@
       <p:grpSpPr/>
       <p:sp>
         <p:nvSpPr>
-          <p:cNvPr id="2" name="Rectangle 1"/>
+          <p:cNvPr id="2" name="TextBox 1"/>
+          <p:cNvSpPr txBox="1"/>
+          <p:nvPr/>
+        </p:nvSpPr>
+        <p:spPr>
+          <a:xfrm>
+            <a:off x="11520000" y="6390000"/>
+            <a:ext cx="503999" cy="251999"/>
+          </a:xfrm>
+          <a:prstGeom prst="rect">
+            <a:avLst/>
+          </a:prstGeom>
+          <a:noFill/>
+        </p:spPr>
+        <p:txBody>
+          <a:bodyPr wrap="square">
+            <a:spAutoFit/>
+          </a:bodyPr>
+          <a:lstStyle/>
+          <a:p>
+            <a:pPr algn="r">
+              <a:lnSpc>
+                <a:spcPct val="125000"/>
+              </a:lnSpc>
+            </a:pPr>
+            <a:r>
+              <a:rPr sz="900" b="0">
+                <a:solidFill>
+                  <a:srgbClr val="6B6963"/>
+                </a:solidFill>
+                <a:latin typeface="Calibri"/>
+              </a:rPr>
+              <a:t>21</a:t>
+            </a:r>
+          </a:p>
+        </p:txBody>
+      </p:sp>
+      <p:sp>
+        <p:nvSpPr>
+          <p:cNvPr id="3" name="Rectangle 2"/>
           <p:cNvSpPr/>
           <p:nvPr/>
         </p:nvSpPr>
@@ -12111,7 +12603,7 @@
       </p:sp>
       <p:sp>
         <p:nvSpPr>
-          <p:cNvPr id="3" name="TextBox 2"/>
+          <p:cNvPr id="4" name="TextBox 3"/>
           <p:cNvSpPr txBox="1"/>
           <p:nvPr/>
         </p:nvSpPr>
@@ -12150,7 +12642,7 @@
       </p:sp>
       <p:sp>
         <p:nvSpPr>
-          <p:cNvPr id="4" name="TextBox 3"/>
+          <p:cNvPr id="5" name="TextBox 4"/>
           <p:cNvSpPr txBox="1"/>
           <p:nvPr/>
         </p:nvSpPr>
@@ -12189,7 +12681,7 @@
       </p:sp>
       <p:graphicFrame>
         <p:nvGraphicFramePr>
-          <p:cNvPr id="5" name="Table 4"/>
+          <p:cNvPr id="6" name="Table 5"/>
           <p:cNvGraphicFramePr>
             <a:graphicFrameLocks noGrp="1"/>
           </p:cNvGraphicFramePr>
@@ -12583,7 +13075,7 @@
       </p:graphicFrame>
       <p:sp>
         <p:nvSpPr>
-          <p:cNvPr id="6" name="TextBox 5"/>
+          <p:cNvPr id="7" name="TextBox 6"/>
           <p:cNvSpPr txBox="1"/>
           <p:nvPr/>
         </p:nvSpPr>
@@ -12638,7 +13130,7 @@
       </p:sp>
       <p:sp>
         <p:nvSpPr>
-          <p:cNvPr id="7" name="TextBox 6"/>
+          <p:cNvPr id="8" name="TextBox 7"/>
           <p:cNvSpPr txBox="1"/>
           <p:nvPr/>
         </p:nvSpPr>
@@ -12677,7 +13169,7 @@
       </p:sp>
       <p:sp>
         <p:nvSpPr>
-          <p:cNvPr id="8" name="TextBox 7"/>
+          <p:cNvPr id="9" name="TextBox 8"/>
           <p:cNvSpPr txBox="1"/>
           <p:nvPr/>
         </p:nvSpPr>
@@ -12732,7 +13224,7 @@
       </p:sp>
       <p:sp>
         <p:nvSpPr>
-          <p:cNvPr id="9" name="Rectangle 8"/>
+          <p:cNvPr id="10" name="Rectangle 9"/>
           <p:cNvSpPr/>
           <p:nvPr/>
         </p:nvSpPr>
@@ -12776,7 +13268,7 @@
       </p:sp>
       <p:sp>
         <p:nvSpPr>
-          <p:cNvPr id="10" name="TextBox 9"/>
+          <p:cNvPr id="11" name="TextBox 10"/>
           <p:cNvSpPr txBox="1"/>
           <p:nvPr/>
         </p:nvSpPr>
@@ -12857,7 +13349,46 @@
       <p:grpSpPr/>
       <p:sp>
         <p:nvSpPr>
-          <p:cNvPr id="2" name="Rectangle 1"/>
+          <p:cNvPr id="2" name="TextBox 1"/>
+          <p:cNvSpPr txBox="1"/>
+          <p:nvPr/>
+        </p:nvSpPr>
+        <p:spPr>
+          <a:xfrm>
+            <a:off x="11520000" y="6390000"/>
+            <a:ext cx="503999" cy="251999"/>
+          </a:xfrm>
+          <a:prstGeom prst="rect">
+            <a:avLst/>
+          </a:prstGeom>
+          <a:noFill/>
+        </p:spPr>
+        <p:txBody>
+          <a:bodyPr wrap="square">
+            <a:spAutoFit/>
+          </a:bodyPr>
+          <a:lstStyle/>
+          <a:p>
+            <a:pPr algn="r">
+              <a:lnSpc>
+                <a:spcPct val="125000"/>
+              </a:lnSpc>
+            </a:pPr>
+            <a:r>
+              <a:rPr sz="900" b="0">
+                <a:solidFill>
+                  <a:srgbClr val="6B6963"/>
+                </a:solidFill>
+                <a:latin typeface="Calibri"/>
+              </a:rPr>
+              <a:t>22</a:t>
+            </a:r>
+          </a:p>
+        </p:txBody>
+      </p:sp>
+      <p:sp>
+        <p:nvSpPr>
+          <p:cNvPr id="3" name="Rectangle 2"/>
           <p:cNvSpPr/>
           <p:nvPr/>
         </p:nvSpPr>
@@ -12901,7 +13432,7 @@
       </p:sp>
       <p:sp>
         <p:nvSpPr>
-          <p:cNvPr id="3" name="TextBox 2"/>
+          <p:cNvPr id="4" name="TextBox 3"/>
           <p:cNvSpPr txBox="1"/>
           <p:nvPr/>
         </p:nvSpPr>
@@ -12940,7 +13471,7 @@
       </p:sp>
       <p:sp>
         <p:nvSpPr>
-          <p:cNvPr id="4" name="TextBox 3"/>
+          <p:cNvPr id="5" name="TextBox 4"/>
           <p:cNvSpPr txBox="1"/>
           <p:nvPr/>
         </p:nvSpPr>
@@ -12979,14 +13510,14 @@
       </p:sp>
       <p:sp>
         <p:nvSpPr>
-          <p:cNvPr id="5" name="Rectangle 4"/>
+          <p:cNvPr id="6" name="Rectangle 5"/>
           <p:cNvSpPr/>
           <p:nvPr/>
         </p:nvSpPr>
         <p:spPr>
           <a:xfrm>
             <a:off x="684000" y="1944000"/>
-            <a:ext cx="39600" cy="1512000"/>
+            <a:ext cx="39600" cy="936000"/>
           </a:xfrm>
           <a:prstGeom prst="rect">
             <a:avLst/>
@@ -13023,14 +13554,14 @@
       </p:sp>
       <p:sp>
         <p:nvSpPr>
-          <p:cNvPr id="6" name="TextBox 5"/>
+          <p:cNvPr id="7" name="TextBox 6"/>
           <p:cNvSpPr txBox="1"/>
           <p:nvPr/>
         </p:nvSpPr>
         <p:spPr>
           <a:xfrm>
             <a:off x="882000" y="1980000"/>
-            <a:ext cx="10548000" cy="1512000"/>
+            <a:ext cx="10548000" cy="936000"/>
           </a:xfrm>
           <a:prstGeom prst="rect">
             <a:avLst/>
@@ -13055,37 +13586,84 @@
                 </a:solidFill>
                 <a:latin typeface="Calibri"/>
               </a:rPr>
-              <a:t>Les indices DC, DMC et BUI du système canadien sont des états récursifs. Le Drought Code est une moyenne exponentielle de la météo passée, de constante de temps 52 jours ; le Duff Moisture Code, 15 jours.</a:t>
-            </a:r>
-          </a:p>
+              <a:t>Les indices DC, DMC et BUI du système canadien sont déjà des états récursifs : des moyennes exponentielles de la météo passée, de constante de temps 52 et 15 jours. Le CEMS livre donc l'état caché que le LSTM devrait réapprendre.</a:t>
+            </a:r>
+          </a:p>
+        </p:txBody>
+      </p:sp>
+      <p:pic>
+        <p:nvPicPr>
+          <p:cNvPr id="8" name="Picture 7" descr="06_les-trois-memoires-temporelles-du-systeme-canadien-france-20.png"/>
+          <p:cNvPicPr>
+            <a:picLocks noChangeAspect="1"/>
+          </p:cNvPicPr>
+          <p:nvPr/>
+        </p:nvPicPr>
+        <p:blipFill>
+          <a:blip r:embed="rId2"/>
+          <a:stretch>
+            <a:fillRect/>
+          </a:stretch>
+        </p:blipFill>
+        <p:spPr>
+          <a:xfrm>
+            <a:off x="684000" y="3080432"/>
+            <a:ext cx="6623999" cy="3235135"/>
+          </a:xfrm>
+          <a:prstGeom prst="rect">
+            <a:avLst/>
+          </a:prstGeom>
+        </p:spPr>
+      </p:pic>
+      <p:sp>
+        <p:nvSpPr>
+          <p:cNvPr id="9" name="TextBox 8"/>
+          <p:cNvSpPr txBox="1"/>
+          <p:nvPr/>
+        </p:nvSpPr>
+        <p:spPr>
+          <a:xfrm>
+            <a:off x="7632000" y="3060000"/>
+            <a:ext cx="3888000" cy="378000"/>
+          </a:xfrm>
+          <a:prstGeom prst="rect">
+            <a:avLst/>
+          </a:prstGeom>
+          <a:noFill/>
+        </p:spPr>
+        <p:txBody>
+          <a:bodyPr wrap="square">
+            <a:spAutoFit/>
+          </a:bodyPr>
+          <a:lstStyle/>
           <a:p>
             <a:pPr>
               <a:lnSpc>
-                <a:spcPct val="130000"/>
+                <a:spcPct val="125000"/>
               </a:lnSpc>
             </a:pPr>
             <a:r>
-              <a:rPr sz="1500" b="0">
+              <a:rPr sz="1300" b="1">
                 <a:solidFill>
                   <a:srgbClr val="0B0B0B"/>
                 </a:solidFill>
                 <a:latin typeface="Calibri"/>
               </a:rPr>
-              <a:t>C'est la forme d'une cellule récurrente, à ceci près que ses coefficients ont été calibrés par cinquante ans de science du feu plutôt qu'estimés sur 9 176 exemples positifs.</a:t>
-            </a:r>
-          </a:p>
-        </p:txBody>
-      </p:sp>
-      <p:sp>
-        <p:nvSpPr>
-          <p:cNvPr id="7" name="TextBox 6"/>
+              <a:t>Trois observations convergent</a:t>
+            </a:r>
+          </a:p>
+        </p:txBody>
+      </p:sp>
+      <p:sp>
+        <p:nvSpPr>
+          <p:cNvPr id="10" name="TextBox 9"/>
           <p:cNvSpPr txBox="1"/>
           <p:nvPr/>
         </p:nvSpPr>
         <p:spPr>
           <a:xfrm>
-            <a:off x="684000" y="3564000"/>
-            <a:ext cx="10800000" cy="468000"/>
+            <a:off x="7632000" y="3438000"/>
+            <a:ext cx="3888000" cy="742996"/>
           </a:xfrm>
           <a:prstGeom prst="rect">
             <a:avLst/>
@@ -13104,27 +13682,27 @@
               </a:lnSpc>
             </a:pPr>
             <a:r>
-              <a:rPr sz="1900" b="1">
+              <a:rPr sz="1300" b="0">
                 <a:solidFill>
-                  <a:srgbClr val="0B0B0B"/>
+                  <a:srgbClr val="6B6963"/>
                 </a:solidFill>
                 <a:latin typeface="Calibri"/>
               </a:rPr>
-              <a:t>Le CEMS livre déjà l'état caché que le LSTM devrait réapprendre.</a:t>
-            </a:r>
-          </a:p>
-        </p:txBody>
-      </p:sp>
-      <p:sp>
-        <p:nvSpPr>
-          <p:cNvPr id="8" name="TextBox 7"/>
+              <a:t>· la PACF tombe de 0.70 au premier retard à 0.08 au troisième : deux à trois jours de mémoire utile ;</a:t>
+            </a:r>
+          </a:p>
+        </p:txBody>
+      </p:sp>
+      <p:sp>
+        <p:nvSpPr>
+          <p:cNvPr id="11" name="TextBox 10"/>
           <p:cNvSpPr txBox="1"/>
           <p:nvPr/>
         </p:nvSpPr>
         <p:spPr>
           <a:xfrm>
-            <a:off x="684000" y="4140000"/>
-            <a:ext cx="10800000" cy="396000"/>
+            <a:off x="7632000" y="4202596"/>
+            <a:ext cx="3888000" cy="495331"/>
           </a:xfrm>
           <a:prstGeom prst="rect">
             <a:avLst/>
@@ -13143,27 +13721,27 @@
               </a:lnSpc>
             </a:pPr>
             <a:r>
-              <a:rPr sz="1400" b="1">
+              <a:rPr sz="1300" b="0">
                 <a:solidFill>
-                  <a:srgbClr val="0B0B0B"/>
+                  <a:srgbClr val="6B6963"/>
                 </a:solidFill>
                 <a:latin typeface="Calibri"/>
               </a:rPr>
-              <a:t>Trois observations indépendantes convergent</a:t>
-            </a:r>
-          </a:p>
-        </p:txBody>
-      </p:sp>
-      <p:sp>
-        <p:nvSpPr>
-          <p:cNvPr id="9" name="TextBox 8"/>
+              <a:t>· l'ARIMA sans exogène donne r = -0.118, une corrélation négative ;</a:t>
+            </a:r>
+          </a:p>
+        </p:txBody>
+      </p:sp>
+      <p:sp>
+        <p:nvSpPr>
+          <p:cNvPr id="12" name="TextBox 11"/>
           <p:cNvSpPr txBox="1"/>
           <p:nvPr/>
         </p:nvSpPr>
         <p:spPr>
           <a:xfrm>
-            <a:off x="684000" y="4536000"/>
-            <a:ext cx="10800000" cy="533433"/>
+            <a:off x="7632000" y="4719528"/>
+            <a:ext cx="3888000" cy="495331"/>
           </a:xfrm>
           <a:prstGeom prst="rect">
             <a:avLst/>
@@ -13182,174 +13760,13 @@
               </a:lnSpc>
             </a:pPr>
             <a:r>
-              <a:rPr sz="1400" b="0">
+              <a:rPr sz="1300" b="0">
                 <a:solidFill>
                   <a:srgbClr val="6B6963"/>
                 </a:solidFill>
                 <a:latin typeface="Calibri"/>
               </a:rPr>
-              <a:t>· la PACF des résidus tombe de 0.70 au premier retard à 0.08 au troisième : la mémoire utile de la série est de deux à trois jours ;</a:t>
-            </a:r>
-          </a:p>
-        </p:txBody>
-      </p:sp>
-      <p:sp>
-        <p:nvSpPr>
-          <p:cNvPr id="10" name="TextBox 9"/>
-          <p:cNvSpPr txBox="1"/>
-          <p:nvPr/>
-        </p:nvSpPr>
-        <p:spPr>
-          <a:xfrm>
-            <a:off x="684000" y="5091033"/>
-            <a:ext cx="10800000" cy="396000"/>
-          </a:xfrm>
-          <a:prstGeom prst="rect">
-            <a:avLst/>
-          </a:prstGeom>
-          <a:noFill/>
-        </p:spPr>
-        <p:txBody>
-          <a:bodyPr wrap="square">
-            <a:spAutoFit/>
-          </a:bodyPr>
-          <a:lstStyle/>
-          <a:p>
-            <a:pPr>
-              <a:lnSpc>
-                <a:spcPct val="125000"/>
-              </a:lnSpc>
-            </a:pPr>
-            <a:r>
-              <a:rPr sz="1400" b="0">
-                <a:solidFill>
-                  <a:srgbClr val="6B6963"/>
-                </a:solidFill>
-                <a:latin typeface="Calibri"/>
-              </a:rPr>
-              <a:t>· l'ARIMA sans exogène est inutilisable, avec r = -0.118, une corrélation négative ;</a:t>
-            </a:r>
-          </a:p>
-        </p:txBody>
-      </p:sp>
-      <p:sp>
-        <p:nvSpPr>
-          <p:cNvPr id="11" name="TextBox 10"/>
-          <p:cNvSpPr txBox="1"/>
-          <p:nvPr/>
-        </p:nvSpPr>
-        <p:spPr>
-          <a:xfrm>
-            <a:off x="684000" y="5487033"/>
-            <a:ext cx="10800000" cy="533433"/>
-          </a:xfrm>
-          <a:prstGeom prst="rect">
-            <a:avLst/>
-          </a:prstGeom>
-          <a:noFill/>
-        </p:spPr>
-        <p:txBody>
-          <a:bodyPr wrap="square">
-            <a:spAutoFit/>
-          </a:bodyPr>
-          <a:lstStyle/>
-          <a:p>
-            <a:pPr>
-              <a:lnSpc>
-                <a:spcPct val="125000"/>
-              </a:lnSpc>
-            </a:pPr>
-            <a:r>
-              <a:rPr sz="1400" b="0">
-                <a:solidFill>
-                  <a:srgbClr val="6B6963"/>
-                </a:solidFill>
-                <a:latin typeface="Calibri"/>
-              </a:rPr>
-              <a:t>· les trois premières variables du modèle C sont part_maquis, danger_effis et erc : le signal dit surtout où se trouve le combustible.</a:t>
-            </a:r>
-          </a:p>
-        </p:txBody>
-      </p:sp>
-      <p:sp>
-        <p:nvSpPr>
-          <p:cNvPr id="12" name="Rectangle 11"/>
-          <p:cNvSpPr/>
-          <p:nvPr/>
-        </p:nvSpPr>
-        <p:spPr>
-          <a:xfrm>
-            <a:off x="684000" y="6150067"/>
-            <a:ext cx="39600" cy="792000"/>
-          </a:xfrm>
-          <a:prstGeom prst="rect">
-            <a:avLst/>
-          </a:prstGeom>
-          <a:solidFill>
-            <a:srgbClr val="C3C2B7"/>
-          </a:solidFill>
-          <a:ln>
-            <a:noFill/>
-          </a:ln>
-          <a:effectLst/>
-        </p:spPr>
-        <p:style>
-          <a:lnRef idx="1">
-            <a:schemeClr val="accent1"/>
-          </a:lnRef>
-          <a:fillRef idx="3">
-            <a:schemeClr val="accent1"/>
-          </a:fillRef>
-          <a:effectRef idx="2">
-            <a:schemeClr val="accent1"/>
-          </a:effectRef>
-          <a:fontRef idx="minor">
-            <a:schemeClr val="lt1"/>
-          </a:fontRef>
-        </p:style>
-        <p:txBody>
-          <a:bodyPr rtlCol="0" anchor="ctr"/>
-          <a:lstStyle/>
-          <a:p>
-            <a:pPr algn="ctr"/>
-          </a:p>
-        </p:txBody>
-      </p:sp>
-      <p:sp>
-        <p:nvSpPr>
-          <p:cNvPr id="13" name="TextBox 12"/>
-          <p:cNvSpPr txBox="1"/>
-          <p:nvPr/>
-        </p:nvSpPr>
-        <p:spPr>
-          <a:xfrm>
-            <a:off x="882000" y="6186067"/>
-            <a:ext cx="10548000" cy="792000"/>
-          </a:xfrm>
-          <a:prstGeom prst="rect">
-            <a:avLst/>
-          </a:prstGeom>
-          <a:noFill/>
-        </p:spPr>
-        <p:txBody>
-          <a:bodyPr wrap="square">
-            <a:spAutoFit/>
-          </a:bodyPr>
-          <a:lstStyle/>
-          <a:p>
-            <a:pPr>
-              <a:lnSpc>
-                <a:spcPct val="130000"/>
-              </a:lnSpc>
-            </a:pPr>
-            <a:r>
-              <a:rPr sz="1350" b="0">
-                <a:solidFill>
-                  <a:srgbClr val="0B0B0B"/>
-                </a:solidFill>
-                <a:latin typeface="Calibri"/>
-              </a:rPr>
-              <a:t>Nuance : les retards 4 à 8 restent significatifs. Avec 7 305 jours le seuil descend à ±0.023, et presque tout le devient. Le retard 8, à 0.034, rend compte de 0.11 % de la variance. Significatif ne veut pas dire utile.</a:t>
+              <a:t>· les trois premières variables du modèle C disent où se trouve le combustible.</a:t>
             </a:r>
           </a:p>
         </p:txBody>
@@ -13382,7 +13799,46 @@
       <p:grpSpPr/>
       <p:sp>
         <p:nvSpPr>
-          <p:cNvPr id="2" name="Rectangle 1"/>
+          <p:cNvPr id="2" name="TextBox 1"/>
+          <p:cNvSpPr txBox="1"/>
+          <p:nvPr/>
+        </p:nvSpPr>
+        <p:spPr>
+          <a:xfrm>
+            <a:off x="11520000" y="6390000"/>
+            <a:ext cx="503999" cy="251999"/>
+          </a:xfrm>
+          <a:prstGeom prst="rect">
+            <a:avLst/>
+          </a:prstGeom>
+          <a:noFill/>
+        </p:spPr>
+        <p:txBody>
+          <a:bodyPr wrap="square">
+            <a:spAutoFit/>
+          </a:bodyPr>
+          <a:lstStyle/>
+          <a:p>
+            <a:pPr algn="r">
+              <a:lnSpc>
+                <a:spcPct val="125000"/>
+              </a:lnSpc>
+            </a:pPr>
+            <a:r>
+              <a:rPr sz="900" b="0">
+                <a:solidFill>
+                  <a:srgbClr val="6B6963"/>
+                </a:solidFill>
+                <a:latin typeface="Calibri"/>
+              </a:rPr>
+              <a:t>23</a:t>
+            </a:r>
+          </a:p>
+        </p:txBody>
+      </p:sp>
+      <p:sp>
+        <p:nvSpPr>
+          <p:cNvPr id="3" name="Rectangle 2"/>
           <p:cNvSpPr/>
           <p:nvPr/>
         </p:nvSpPr>
@@ -13426,7 +13882,7 @@
       </p:sp>
       <p:sp>
         <p:nvSpPr>
-          <p:cNvPr id="3" name="TextBox 2"/>
+          <p:cNvPr id="4" name="TextBox 3"/>
           <p:cNvSpPr txBox="1"/>
           <p:nvPr/>
         </p:nvSpPr>
@@ -13465,7 +13921,7 @@
       </p:sp>
       <p:sp>
         <p:nvSpPr>
-          <p:cNvPr id="4" name="TextBox 3"/>
+          <p:cNvPr id="5" name="TextBox 4"/>
           <p:cNvSpPr txBox="1"/>
           <p:nvPr/>
         </p:nvSpPr>
@@ -13504,7 +13960,7 @@
       </p:sp>
       <p:graphicFrame>
         <p:nvGraphicFramePr>
-          <p:cNvPr id="5" name="Table 4"/>
+          <p:cNvPr id="6" name="Table 5"/>
           <p:cNvGraphicFramePr>
             <a:graphicFrameLocks noGrp="1"/>
           </p:cNvGraphicFramePr>
@@ -13512,7 +13968,7 @@
         </p:nvGraphicFramePr>
         <p:xfrm>
           <a:off x="684000" y="1944000"/>
-          <a:ext cx="5220000" cy="1800000"/>
+          <a:ext cx="5220000" cy="1584000"/>
         </p:xfrm>
         <a:graphic>
           <a:graphicData uri="http://schemas.openxmlformats.org/drawingml/2006/table">
@@ -13526,7 +13982,7 @@
                 <a:gridCol w="1080000"/>
                 <a:gridCol w="900000"/>
               </a:tblGrid>
-              <a:tr h="360000">
+              <a:tr h="316800">
                 <a:tc>
                   <a:txBody>
                     <a:bodyPr/>
@@ -13616,7 +14072,7 @@
                   </a:tcPr>
                 </a:tc>
               </a:tr>
-              <a:tr h="360000">
+              <a:tr h="316800">
                 <a:tc>
                   <a:txBody>
                     <a:bodyPr/>
@@ -13706,7 +14162,7 @@
                   </a:tcPr>
                 </a:tc>
               </a:tr>
-              <a:tr h="360000">
+              <a:tr h="316800">
                 <a:tc>
                   <a:txBody>
                     <a:bodyPr/>
@@ -13796,7 +14252,7 @@
                   </a:tcPr>
                 </a:tc>
               </a:tr>
-              <a:tr h="360000">
+              <a:tr h="316800">
                 <a:tc>
                   <a:txBody>
                     <a:bodyPr/>
@@ -13886,7 +14342,7 @@
                   </a:tcPr>
                 </a:tc>
               </a:tr>
-              <a:tr h="360000">
+              <a:tr h="316800">
                 <a:tc>
                   <a:txBody>
                     <a:bodyPr/>
@@ -13982,14 +14438,14 @@
       </p:graphicFrame>
       <p:sp>
         <p:nvSpPr>
-          <p:cNvPr id="6" name="TextBox 5"/>
+          <p:cNvPr id="7" name="TextBox 6"/>
           <p:cNvSpPr txBox="1"/>
           <p:nvPr/>
         </p:nvSpPr>
         <p:spPr>
           <a:xfrm>
-            <a:off x="684000" y="3888000"/>
-            <a:ext cx="5220000" cy="864000"/>
+            <a:off x="684000" y="3636000"/>
+            <a:ext cx="5220000" cy="648000"/>
           </a:xfrm>
           <a:prstGeom prst="rect">
             <a:avLst/>
@@ -14014,22 +14470,22 @@
                 </a:solidFill>
                 <a:latin typeface="Calibri"/>
               </a:rPr>
-              <a:t>H₀ est « la série a une racine unitaire », donc non stationnaire. Rejeter H₀ signifie stationnaire, ce qui est l'inverse de l'intuition.</a:t>
+              <a:t>H₀ est « racine unitaire », donc non stationnaire. Rejeter H₀ signifie stationnaire, l'inverse de l'intuition.</a:t>
             </a:r>
           </a:p>
         </p:txBody>
       </p:sp>
       <p:graphicFrame>
         <p:nvGraphicFramePr>
-          <p:cNvPr id="7" name="Table 6"/>
+          <p:cNvPr id="8" name="Table 7"/>
           <p:cNvGraphicFramePr>
             <a:graphicFrameLocks noGrp="1"/>
           </p:cNvGraphicFramePr>
           <p:nvPr/>
         </p:nvGraphicFramePr>
         <p:xfrm>
-          <a:off x="6300000" y="1944000"/>
-          <a:ext cx="5219999" cy="1440000"/>
+          <a:off x="684000" y="4392000"/>
+          <a:ext cx="5219999" cy="1296000"/>
         </p:xfrm>
         <a:graphic>
           <a:graphicData uri="http://schemas.openxmlformats.org/drawingml/2006/table">
@@ -14042,7 +14498,7 @@
                 <a:gridCol w="1007999"/>
                 <a:gridCol w="972000"/>
               </a:tblGrid>
-              <a:tr h="360000">
+              <a:tr h="324000">
                 <a:tc>
                   <a:txBody>
                     <a:bodyPr/>
@@ -14110,7 +14566,7 @@
                   </a:tcPr>
                 </a:tc>
               </a:tr>
-              <a:tr h="360000">
+              <a:tr h="324000">
                 <a:tc>
                   <a:txBody>
                     <a:bodyPr/>
@@ -14178,7 +14634,7 @@
                   </a:tcPr>
                 </a:tc>
               </a:tr>
-              <a:tr h="360000">
+              <a:tr h="324000">
                 <a:tc>
                   <a:txBody>
                     <a:bodyPr/>
@@ -14246,7 +14702,7 @@
                   </a:tcPr>
                 </a:tc>
               </a:tr>
-              <a:tr h="360000">
+              <a:tr h="324000">
                 <a:tc>
                   <a:txBody>
                     <a:bodyPr/>
@@ -14320,14 +14776,14 @@
       </p:graphicFrame>
       <p:sp>
         <p:nvSpPr>
-          <p:cNvPr id="8" name="TextBox 7"/>
+          <p:cNvPr id="9" name="TextBox 8"/>
           <p:cNvSpPr txBox="1"/>
           <p:nvPr/>
         </p:nvSpPr>
         <p:spPr>
           <a:xfrm>
-            <a:off x="6300000" y="3528000"/>
-            <a:ext cx="5220000" cy="720000"/>
+            <a:off x="684000" y="5760000"/>
+            <a:ext cx="5220000" cy="576000"/>
           </a:xfrm>
           <a:prstGeom prst="rect">
             <a:avLst/>
@@ -14352,21 +14808,45 @@
                 </a:solidFill>
                 <a:latin typeface="Calibri"/>
               </a:rPr>
-              <a:t>Ajusté sur 2006-2019, évalué sur 2020-2022. Le test 2023-2025 n'est pas touché, même pour une cible différente.</a:t>
-            </a:r>
-          </a:p>
-        </p:txBody>
-      </p:sp>
-      <p:sp>
-        <p:nvSpPr>
-          <p:cNvPr id="9" name="Rectangle 8"/>
+              <a:t>Ajusté sur 2006-2019, évalué sur 2020-2022. Le test 2023-2025 n'est pas touché.</a:t>
+            </a:r>
+          </a:p>
+        </p:txBody>
+      </p:sp>
+      <p:pic>
+        <p:nvPicPr>
+          <p:cNvPr id="10" name="Picture 9" descr="series_acf_pacf.png"/>
+          <p:cNvPicPr>
+            <a:picLocks noChangeAspect="1"/>
+          </p:cNvPicPr>
+          <p:nvPr/>
+        </p:nvPicPr>
+        <p:blipFill>
+          <a:blip r:embed="rId2"/>
+          <a:stretch>
+            <a:fillRect/>
+          </a:stretch>
+        </p:blipFill>
+        <p:spPr>
+          <a:xfrm>
+            <a:off x="6120000" y="1957123"/>
+            <a:ext cx="5400000" cy="2277753"/>
+          </a:xfrm>
+          <a:prstGeom prst="rect">
+            <a:avLst/>
+          </a:prstGeom>
+        </p:spPr>
+      </p:pic>
+      <p:sp>
+        <p:nvSpPr>
+          <p:cNvPr id="11" name="Rectangle 10"/>
           <p:cNvSpPr/>
           <p:nvPr/>
         </p:nvSpPr>
         <p:spPr>
           <a:xfrm>
-            <a:off x="684000" y="4896000"/>
-            <a:ext cx="39600" cy="1584000"/>
+            <a:off x="6120000" y="4464000"/>
+            <a:ext cx="39600" cy="1655999"/>
           </a:xfrm>
           <a:prstGeom prst="rect">
             <a:avLst/>
@@ -14403,14 +14883,14 @@
       </p:sp>
       <p:sp>
         <p:nvSpPr>
-          <p:cNvPr id="10" name="TextBox 9"/>
+          <p:cNvPr id="12" name="TextBox 11"/>
           <p:cNvSpPr txBox="1"/>
           <p:nvPr/>
         </p:nvSpPr>
         <p:spPr>
           <a:xfrm>
-            <a:off x="882000" y="4932000"/>
-            <a:ext cx="10548000" cy="1584000"/>
+            <a:off x="6318000" y="4500000"/>
+            <a:ext cx="5148000" cy="1655999"/>
           </a:xfrm>
           <a:prstGeom prst="rect">
             <a:avLst/>
@@ -14429,13 +14909,13 @@
               </a:lnSpc>
             </a:pPr>
             <a:r>
-              <a:rPr sz="1500" b="0">
+              <a:rPr sz="1400" b="0">
                 <a:solidFill>
                   <a:srgbClr val="0B0B0B"/>
                 </a:solidFill>
                 <a:latin typeface="Calibri"/>
               </a:rPr>
-              <a:t>La dernière ligne est celle qui compte. Un ARIMA sans variable exogène donne une corrélation négative : à 1 096 pas d'horizon, un modèle autorégressif dont la mémoire utile vaut trois jours a oublié son point de départ et converge vers la moyenne.</a:t>
+              <a:t>La dernière ligne du tableau est celle qui compte. Un ARIMA sans variable exogène donne une corrélation négative : à 1 096 pas d'horizon, un modèle dont la mémoire utile vaut trois jours a oublié son point de départ et converge vers la moyenne.</a:t>
             </a:r>
           </a:p>
           <a:p>
@@ -14445,13 +14925,13 @@
               </a:lnSpc>
             </a:pPr>
             <a:r>
-              <a:rPr sz="1500" b="0">
+              <a:rPr sz="1400" b="0">
                 <a:solidFill>
                   <a:srgbClr val="0B0B0B"/>
                 </a:solidFill>
                 <a:latin typeface="Calibri"/>
               </a:rPr>
-              <a:t>Ajouter le FWI fait tomber l'erreur de 37 %. La prévisibilité du feu est dans la météo, pas dans son propre passé.</a:t>
+              <a:t>Ajouter le FWI fait tomber l'erreur de 37 %.</a:t>
             </a:r>
           </a:p>
         </p:txBody>
@@ -14484,7 +14964,46 @@
       <p:grpSpPr/>
       <p:sp>
         <p:nvSpPr>
-          <p:cNvPr id="2" name="Rectangle 1"/>
+          <p:cNvPr id="2" name="TextBox 1"/>
+          <p:cNvSpPr txBox="1"/>
+          <p:nvPr/>
+        </p:nvSpPr>
+        <p:spPr>
+          <a:xfrm>
+            <a:off x="11520000" y="6390000"/>
+            <a:ext cx="503999" cy="251999"/>
+          </a:xfrm>
+          <a:prstGeom prst="rect">
+            <a:avLst/>
+          </a:prstGeom>
+          <a:noFill/>
+        </p:spPr>
+        <p:txBody>
+          <a:bodyPr wrap="square">
+            <a:spAutoFit/>
+          </a:bodyPr>
+          <a:lstStyle/>
+          <a:p>
+            <a:pPr algn="r">
+              <a:lnSpc>
+                <a:spcPct val="125000"/>
+              </a:lnSpc>
+            </a:pPr>
+            <a:r>
+              <a:rPr sz="900" b="0">
+                <a:solidFill>
+                  <a:srgbClr val="6B6963"/>
+                </a:solidFill>
+                <a:latin typeface="Calibri"/>
+              </a:rPr>
+              <a:t>24</a:t>
+            </a:r>
+          </a:p>
+        </p:txBody>
+      </p:sp>
+      <p:sp>
+        <p:nvSpPr>
+          <p:cNvPr id="3" name="Rectangle 2"/>
           <p:cNvSpPr/>
           <p:nvPr/>
         </p:nvSpPr>
@@ -14528,7 +15047,7 @@
       </p:sp>
       <p:sp>
         <p:nvSpPr>
-          <p:cNvPr id="3" name="TextBox 2"/>
+          <p:cNvPr id="4" name="TextBox 3"/>
           <p:cNvSpPr txBox="1"/>
           <p:nvPr/>
         </p:nvSpPr>
@@ -14567,7 +15086,7 @@
       </p:sp>
       <p:sp>
         <p:nvSpPr>
-          <p:cNvPr id="4" name="TextBox 3"/>
+          <p:cNvPr id="5" name="TextBox 4"/>
           <p:cNvSpPr txBox="1"/>
           <p:nvPr/>
         </p:nvSpPr>
@@ -14606,7 +15125,7 @@
       </p:sp>
       <p:graphicFrame>
         <p:nvGraphicFramePr>
-          <p:cNvPr id="5" name="Table 4"/>
+          <p:cNvPr id="6" name="Table 5"/>
           <p:cNvGraphicFramePr>
             <a:graphicFrameLocks noGrp="1"/>
           </p:cNvGraphicFramePr>
@@ -14837,7 +15356,7 @@
       </p:graphicFrame>
       <p:sp>
         <p:nvSpPr>
-          <p:cNvPr id="6" name="TextBox 5"/>
+          <p:cNvPr id="7" name="TextBox 6"/>
           <p:cNvSpPr txBox="1"/>
           <p:nvPr/>
         </p:nvSpPr>
@@ -14876,14 +15395,14 @@
       </p:sp>
       <p:sp>
         <p:nvSpPr>
-          <p:cNvPr id="7" name="TextBox 6"/>
+          <p:cNvPr id="8" name="TextBox 7"/>
           <p:cNvSpPr txBox="1"/>
           <p:nvPr/>
         </p:nvSpPr>
         <p:spPr>
           <a:xfrm>
             <a:off x="684000" y="3654000"/>
-            <a:ext cx="10800000" cy="771573"/>
+            <a:ext cx="10800000" cy="378000"/>
           </a:xfrm>
           <a:prstGeom prst="rect">
             <a:avLst/>
@@ -14908,20 +15427,20 @@
                 </a:solidFill>
                 <a:latin typeface="Calibri"/>
               </a:rPr>
-              <a:t>· v3 tire 29 % de son importance de l'historique des feux, et la BDIFF ne publie pas l'année en cours : les feux de 2026 sortiront au printemps 2027. Aujourd'hui, feux_commune_7j vaudrait le décompte d'une semaine de décembre 2025. Pas imprécis : faux.</a:t>
-            </a:r>
-          </a:p>
-        </p:txBody>
-      </p:sp>
-      <p:sp>
-        <p:nvSpPr>
-          <p:cNvPr id="8" name="TextBox 7"/>
+              <a:t>· v3 tire 29 % de son importance de l'historique des feux, et la BDIFF ne publie pas l'année en cours. Pas imprécis : faux.</a:t>
+            </a:r>
+          </a:p>
+        </p:txBody>
+      </p:sp>
+      <p:sp>
+        <p:nvSpPr>
+          <p:cNvPr id="9" name="TextBox 8"/>
           <p:cNvSpPr txBox="1"/>
           <p:nvPr/>
         </p:nvSpPr>
         <p:spPr>
           <a:xfrm>
-            <a:off x="684000" y="4447173"/>
+            <a:off x="684000" y="4032000"/>
             <a:ext cx="10800000" cy="378000"/>
           </a:xfrm>
           <a:prstGeom prst="rect">
@@ -14954,13 +15473,13 @@
       </p:sp>
       <p:sp>
         <p:nvSpPr>
-          <p:cNvPr id="9" name="TextBox 8"/>
+          <p:cNvPr id="10" name="TextBox 9"/>
           <p:cNvSpPr txBox="1"/>
           <p:nvPr/>
         </p:nvSpPr>
         <p:spPr>
           <a:xfrm>
-            <a:off x="684000" y="4825173"/>
+            <a:off x="684000" y="4410000"/>
             <a:ext cx="10800000" cy="514382"/>
           </a:xfrm>
           <a:prstGeom prst="rect">
@@ -14993,13 +15512,13 @@
       </p:sp>
       <p:sp>
         <p:nvSpPr>
-          <p:cNvPr id="10" name="TextBox 9"/>
+          <p:cNvPr id="11" name="TextBox 10"/>
           <p:cNvSpPr txBox="1"/>
           <p:nvPr/>
         </p:nvSpPr>
         <p:spPr>
           <a:xfrm>
-            <a:off x="684000" y="5361156"/>
+            <a:off x="684000" y="4945982"/>
             <a:ext cx="10800000" cy="378000"/>
           </a:xfrm>
           <a:prstGeom prst="rect">
@@ -15032,13 +15551,13 @@
       </p:sp>
       <p:sp>
         <p:nvSpPr>
-          <p:cNvPr id="11" name="TextBox 10"/>
+          <p:cNvPr id="12" name="TextBox 11"/>
           <p:cNvSpPr txBox="1"/>
           <p:nvPr/>
         </p:nvSpPr>
         <p:spPr>
           <a:xfrm>
-            <a:off x="684000" y="5739156"/>
+            <a:off x="684000" y="5323982"/>
             <a:ext cx="10800000" cy="378000"/>
           </a:xfrm>
           <a:prstGeom prst="rect">
@@ -15071,13 +15590,13 @@
       </p:sp>
       <p:sp>
         <p:nvSpPr>
-          <p:cNvPr id="12" name="Rectangle 11"/>
+          <p:cNvPr id="13" name="Rectangle 12"/>
           <p:cNvSpPr/>
           <p:nvPr/>
         </p:nvSpPr>
         <p:spPr>
           <a:xfrm>
-            <a:off x="684000" y="6225156"/>
+            <a:off x="684000" y="5809982"/>
             <a:ext cx="39600" cy="648000"/>
           </a:xfrm>
           <a:prstGeom prst="rect">
@@ -15115,13 +15634,13 @@
       </p:sp>
       <p:sp>
         <p:nvSpPr>
-          <p:cNvPr id="13" name="TextBox 12"/>
+          <p:cNvPr id="14" name="TextBox 13"/>
           <p:cNvSpPr txBox="1"/>
           <p:nvPr/>
         </p:nvSpPr>
         <p:spPr>
           <a:xfrm>
-            <a:off x="882000" y="6261156"/>
+            <a:off x="882000" y="5845982"/>
             <a:ext cx="10548000" cy="648000"/>
           </a:xfrm>
           <a:prstGeom prst="rect">
@@ -15180,7 +15699,46 @@
       <p:grpSpPr/>
       <p:sp>
         <p:nvSpPr>
-          <p:cNvPr id="2" name="Rectangle 1"/>
+          <p:cNvPr id="2" name="TextBox 1"/>
+          <p:cNvSpPr txBox="1"/>
+          <p:nvPr/>
+        </p:nvSpPr>
+        <p:spPr>
+          <a:xfrm>
+            <a:off x="11520000" y="6390000"/>
+            <a:ext cx="503999" cy="251999"/>
+          </a:xfrm>
+          <a:prstGeom prst="rect">
+            <a:avLst/>
+          </a:prstGeom>
+          <a:noFill/>
+        </p:spPr>
+        <p:txBody>
+          <a:bodyPr wrap="square">
+            <a:spAutoFit/>
+          </a:bodyPr>
+          <a:lstStyle/>
+          <a:p>
+            <a:pPr algn="r">
+              <a:lnSpc>
+                <a:spcPct val="125000"/>
+              </a:lnSpc>
+            </a:pPr>
+            <a:r>
+              <a:rPr sz="900" b="0">
+                <a:solidFill>
+                  <a:srgbClr val="6B6963"/>
+                </a:solidFill>
+                <a:latin typeface="Calibri"/>
+              </a:rPr>
+              <a:t>25</a:t>
+            </a:r>
+          </a:p>
+        </p:txBody>
+      </p:sp>
+      <p:sp>
+        <p:nvSpPr>
+          <p:cNvPr id="3" name="Rectangle 2"/>
           <p:cNvSpPr/>
           <p:nvPr/>
         </p:nvSpPr>
@@ -15224,7 +15782,7 @@
       </p:sp>
       <p:sp>
         <p:nvSpPr>
-          <p:cNvPr id="3" name="TextBox 2"/>
+          <p:cNvPr id="4" name="TextBox 3"/>
           <p:cNvSpPr txBox="1"/>
           <p:nvPr/>
         </p:nvSpPr>
@@ -15263,7 +15821,7 @@
       </p:sp>
       <p:sp>
         <p:nvSpPr>
-          <p:cNvPr id="4" name="TextBox 3"/>
+          <p:cNvPr id="5" name="TextBox 4"/>
           <p:cNvSpPr txBox="1"/>
           <p:nvPr/>
         </p:nvSpPr>
@@ -15302,7 +15860,7 @@
       </p:sp>
       <p:pic>
         <p:nvPicPr>
-          <p:cNvPr id="5" name="Picture 4" descr="spatial.png"/>
+          <p:cNvPr id="6" name="Picture 5" descr="spatial.png"/>
           <p:cNvPicPr>
             <a:picLocks noChangeAspect="1"/>
           </p:cNvPicPr>
@@ -15326,7 +15884,7 @@
       </p:pic>
       <p:sp>
         <p:nvSpPr>
-          <p:cNvPr id="6" name="Rectangle 5"/>
+          <p:cNvPr id="7" name="Rectangle 6"/>
           <p:cNvSpPr/>
           <p:nvPr/>
         </p:nvSpPr>
@@ -15370,7 +15928,7 @@
       </p:sp>
       <p:sp>
         <p:nvSpPr>
-          <p:cNvPr id="7" name="TextBox 6"/>
+          <p:cNvPr id="8" name="TextBox 7"/>
           <p:cNvSpPr txBox="1"/>
           <p:nvPr/>
         </p:nvSpPr>
@@ -15451,7 +16009,46 @@
       <p:grpSpPr/>
       <p:sp>
         <p:nvSpPr>
-          <p:cNvPr id="2" name="Rectangle 1"/>
+          <p:cNvPr id="2" name="TextBox 1"/>
+          <p:cNvSpPr txBox="1"/>
+          <p:nvPr/>
+        </p:nvSpPr>
+        <p:spPr>
+          <a:xfrm>
+            <a:off x="11520000" y="6390000"/>
+            <a:ext cx="503999" cy="251999"/>
+          </a:xfrm>
+          <a:prstGeom prst="rect">
+            <a:avLst/>
+          </a:prstGeom>
+          <a:noFill/>
+        </p:spPr>
+        <p:txBody>
+          <a:bodyPr wrap="square">
+            <a:spAutoFit/>
+          </a:bodyPr>
+          <a:lstStyle/>
+          <a:p>
+            <a:pPr algn="r">
+              <a:lnSpc>
+                <a:spcPct val="125000"/>
+              </a:lnSpc>
+            </a:pPr>
+            <a:r>
+              <a:rPr sz="900" b="0">
+                <a:solidFill>
+                  <a:srgbClr val="6B6963"/>
+                </a:solidFill>
+                <a:latin typeface="Calibri"/>
+              </a:rPr>
+              <a:t>26</a:t>
+            </a:r>
+          </a:p>
+        </p:txBody>
+      </p:sp>
+      <p:sp>
+        <p:nvSpPr>
+          <p:cNvPr id="3" name="Rectangle 2"/>
           <p:cNvSpPr/>
           <p:nvPr/>
         </p:nvSpPr>
@@ -15495,7 +16092,7 @@
       </p:sp>
       <p:sp>
         <p:nvSpPr>
-          <p:cNvPr id="3" name="TextBox 2"/>
+          <p:cNvPr id="4" name="TextBox 3"/>
           <p:cNvSpPr txBox="1"/>
           <p:nvPr/>
         </p:nvSpPr>
@@ -15534,7 +16131,7 @@
       </p:sp>
       <p:sp>
         <p:nvSpPr>
-          <p:cNvPr id="4" name="TextBox 3"/>
+          <p:cNvPr id="5" name="TextBox 4"/>
           <p:cNvSpPr txBox="1"/>
           <p:nvPr/>
         </p:nvSpPr>
@@ -15573,7 +16170,7 @@
       </p:sp>
       <p:graphicFrame>
         <p:nvGraphicFramePr>
-          <p:cNvPr id="5" name="Table 4"/>
+          <p:cNvPr id="6" name="Table 5"/>
           <p:cNvGraphicFramePr>
             <a:graphicFrameLocks noGrp="1"/>
           </p:cNvGraphicFramePr>
@@ -16050,7 +16647,7 @@
       </p:graphicFrame>
       <p:sp>
         <p:nvSpPr>
-          <p:cNvPr id="6" name="TextBox 5"/>
+          <p:cNvPr id="7" name="TextBox 6"/>
           <p:cNvSpPr txBox="1"/>
           <p:nvPr/>
         </p:nvSpPr>
@@ -16089,7 +16686,7 @@
       </p:sp>
       <p:sp>
         <p:nvSpPr>
-          <p:cNvPr id="7" name="TextBox 6"/>
+          <p:cNvPr id="8" name="TextBox 7"/>
           <p:cNvSpPr txBox="1"/>
           <p:nvPr/>
         </p:nvSpPr>
@@ -16128,7 +16725,7 @@
       </p:sp>
       <p:sp>
         <p:nvSpPr>
-          <p:cNvPr id="8" name="TextBox 7"/>
+          <p:cNvPr id="9" name="TextBox 8"/>
           <p:cNvSpPr txBox="1"/>
           <p:nvPr/>
         </p:nvSpPr>
@@ -16167,7 +16764,7 @@
       </p:sp>
       <p:sp>
         <p:nvSpPr>
-          <p:cNvPr id="9" name="TextBox 8"/>
+          <p:cNvPr id="10" name="TextBox 9"/>
           <p:cNvSpPr txBox="1"/>
           <p:nvPr/>
         </p:nvSpPr>
@@ -16206,7 +16803,7 @@
       </p:sp>
       <p:sp>
         <p:nvSpPr>
-          <p:cNvPr id="10" name="TextBox 9"/>
+          <p:cNvPr id="11" name="TextBox 10"/>
           <p:cNvSpPr txBox="1"/>
           <p:nvPr/>
         </p:nvSpPr>
@@ -16245,7 +16842,7 @@
       </p:sp>
       <p:sp>
         <p:nvSpPr>
-          <p:cNvPr id="11" name="TextBox 10"/>
+          <p:cNvPr id="12" name="TextBox 11"/>
           <p:cNvSpPr txBox="1"/>
           <p:nvPr/>
         </p:nvSpPr>
@@ -16310,7 +16907,46 @@
       <p:grpSpPr/>
       <p:sp>
         <p:nvSpPr>
-          <p:cNvPr id="2" name="Rectangle 1"/>
+          <p:cNvPr id="2" name="TextBox 1"/>
+          <p:cNvSpPr txBox="1"/>
+          <p:nvPr/>
+        </p:nvSpPr>
+        <p:spPr>
+          <a:xfrm>
+            <a:off x="11520000" y="6390000"/>
+            <a:ext cx="503999" cy="251999"/>
+          </a:xfrm>
+          <a:prstGeom prst="rect">
+            <a:avLst/>
+          </a:prstGeom>
+          <a:noFill/>
+        </p:spPr>
+        <p:txBody>
+          <a:bodyPr wrap="square">
+            <a:spAutoFit/>
+          </a:bodyPr>
+          <a:lstStyle/>
+          <a:p>
+            <a:pPr algn="r">
+              <a:lnSpc>
+                <a:spcPct val="125000"/>
+              </a:lnSpc>
+            </a:pPr>
+            <a:r>
+              <a:rPr sz="900" b="0">
+                <a:solidFill>
+                  <a:srgbClr val="6B6963"/>
+                </a:solidFill>
+                <a:latin typeface="Calibri"/>
+              </a:rPr>
+              <a:t>27</a:t>
+            </a:r>
+          </a:p>
+        </p:txBody>
+      </p:sp>
+      <p:sp>
+        <p:nvSpPr>
+          <p:cNvPr id="3" name="Rectangle 2"/>
           <p:cNvSpPr/>
           <p:nvPr/>
         </p:nvSpPr>
@@ -16354,7 +16990,7 @@
       </p:sp>
       <p:sp>
         <p:nvSpPr>
-          <p:cNvPr id="3" name="TextBox 2"/>
+          <p:cNvPr id="4" name="TextBox 3"/>
           <p:cNvSpPr txBox="1"/>
           <p:nvPr/>
         </p:nvSpPr>
@@ -16393,7 +17029,7 @@
       </p:sp>
       <p:sp>
         <p:nvSpPr>
-          <p:cNvPr id="4" name="TextBox 3"/>
+          <p:cNvPr id="5" name="TextBox 4"/>
           <p:cNvSpPr txBox="1"/>
           <p:nvPr/>
         </p:nvSpPr>
@@ -16432,7 +17068,7 @@
       </p:sp>
       <p:graphicFrame>
         <p:nvGraphicFramePr>
-          <p:cNvPr id="5" name="Table 4"/>
+          <p:cNvPr id="6" name="Table 5"/>
           <p:cNvGraphicFramePr>
             <a:graphicFrameLocks noGrp="1"/>
           </p:cNvGraphicFramePr>
@@ -16998,7 +17634,7 @@
       </p:graphicFrame>
       <p:sp>
         <p:nvSpPr>
-          <p:cNvPr id="6" name="Rectangle 5"/>
+          <p:cNvPr id="7" name="Rectangle 6"/>
           <p:cNvSpPr/>
           <p:nvPr/>
         </p:nvSpPr>
@@ -17042,7 +17678,7 @@
       </p:sp>
       <p:sp>
         <p:nvSpPr>
-          <p:cNvPr id="7" name="TextBox 6"/>
+          <p:cNvPr id="8" name="TextBox 7"/>
           <p:cNvSpPr txBox="1"/>
           <p:nvPr/>
         </p:nvSpPr>
@@ -17139,7 +17775,46 @@
       <p:grpSpPr/>
       <p:sp>
         <p:nvSpPr>
-          <p:cNvPr id="2" name="Rectangle 1"/>
+          <p:cNvPr id="2" name="TextBox 1"/>
+          <p:cNvSpPr txBox="1"/>
+          <p:nvPr/>
+        </p:nvSpPr>
+        <p:spPr>
+          <a:xfrm>
+            <a:off x="11520000" y="6390000"/>
+            <a:ext cx="503999" cy="251999"/>
+          </a:xfrm>
+          <a:prstGeom prst="rect">
+            <a:avLst/>
+          </a:prstGeom>
+          <a:noFill/>
+        </p:spPr>
+        <p:txBody>
+          <a:bodyPr wrap="square">
+            <a:spAutoFit/>
+          </a:bodyPr>
+          <a:lstStyle/>
+          <a:p>
+            <a:pPr algn="r">
+              <a:lnSpc>
+                <a:spcPct val="125000"/>
+              </a:lnSpc>
+            </a:pPr>
+            <a:r>
+              <a:rPr sz="900" b="0">
+                <a:solidFill>
+                  <a:srgbClr val="6B6963"/>
+                </a:solidFill>
+                <a:latin typeface="Calibri"/>
+              </a:rPr>
+              <a:t>28</a:t>
+            </a:r>
+          </a:p>
+        </p:txBody>
+      </p:sp>
+      <p:sp>
+        <p:nvSpPr>
+          <p:cNvPr id="3" name="Rectangle 2"/>
           <p:cNvSpPr/>
           <p:nvPr/>
         </p:nvSpPr>
@@ -17183,7 +17858,7 @@
       </p:sp>
       <p:sp>
         <p:nvSpPr>
-          <p:cNvPr id="3" name="TextBox 2"/>
+          <p:cNvPr id="4" name="TextBox 3"/>
           <p:cNvSpPr txBox="1"/>
           <p:nvPr/>
         </p:nvSpPr>
@@ -17222,7 +17897,7 @@
       </p:sp>
       <p:sp>
         <p:nvSpPr>
-          <p:cNvPr id="4" name="TextBox 3"/>
+          <p:cNvPr id="5" name="TextBox 4"/>
           <p:cNvSpPr txBox="1"/>
           <p:nvPr/>
         </p:nvSpPr>
@@ -17261,7 +17936,7 @@
       </p:sp>
       <p:graphicFrame>
         <p:nvGraphicFramePr>
-          <p:cNvPr id="5" name="Table 4"/>
+          <p:cNvPr id="6" name="Table 5"/>
           <p:cNvGraphicFramePr>
             <a:graphicFrameLocks noGrp="1"/>
           </p:cNvGraphicFramePr>
@@ -17829,7 +18504,7 @@
       </p:graphicFrame>
       <p:sp>
         <p:nvSpPr>
-          <p:cNvPr id="6" name="Rectangle 5"/>
+          <p:cNvPr id="7" name="Rectangle 6"/>
           <p:cNvSpPr/>
           <p:nvPr/>
         </p:nvSpPr>
@@ -17873,7 +18548,7 @@
       </p:sp>
       <p:sp>
         <p:nvSpPr>
-          <p:cNvPr id="7" name="TextBox 6"/>
+          <p:cNvPr id="8" name="TextBox 7"/>
           <p:cNvSpPr txBox="1"/>
           <p:nvPr/>
         </p:nvSpPr>
@@ -17954,7 +18629,46 @@
       <p:grpSpPr/>
       <p:sp>
         <p:nvSpPr>
-          <p:cNvPr id="2" name="Rectangle 1"/>
+          <p:cNvPr id="2" name="TextBox 1"/>
+          <p:cNvSpPr txBox="1"/>
+          <p:nvPr/>
+        </p:nvSpPr>
+        <p:spPr>
+          <a:xfrm>
+            <a:off x="11520000" y="6390000"/>
+            <a:ext cx="503999" cy="251999"/>
+          </a:xfrm>
+          <a:prstGeom prst="rect">
+            <a:avLst/>
+          </a:prstGeom>
+          <a:noFill/>
+        </p:spPr>
+        <p:txBody>
+          <a:bodyPr wrap="square">
+            <a:spAutoFit/>
+          </a:bodyPr>
+          <a:lstStyle/>
+          <a:p>
+            <a:pPr algn="r">
+              <a:lnSpc>
+                <a:spcPct val="125000"/>
+              </a:lnSpc>
+            </a:pPr>
+            <a:r>
+              <a:rPr sz="900" b="0">
+                <a:solidFill>
+                  <a:srgbClr val="6B6963"/>
+                </a:solidFill>
+                <a:latin typeface="Calibri"/>
+              </a:rPr>
+              <a:t>29</a:t>
+            </a:r>
+          </a:p>
+        </p:txBody>
+      </p:sp>
+      <p:sp>
+        <p:nvSpPr>
+          <p:cNvPr id="3" name="Rectangle 2"/>
           <p:cNvSpPr/>
           <p:nvPr/>
         </p:nvSpPr>
@@ -17998,7 +18712,7 @@
       </p:sp>
       <p:sp>
         <p:nvSpPr>
-          <p:cNvPr id="3" name="TextBox 2"/>
+          <p:cNvPr id="4" name="TextBox 3"/>
           <p:cNvSpPr txBox="1"/>
           <p:nvPr/>
         </p:nvSpPr>
@@ -18037,7 +18751,7 @@
       </p:sp>
       <p:sp>
         <p:nvSpPr>
-          <p:cNvPr id="4" name="TextBox 3"/>
+          <p:cNvPr id="5" name="TextBox 4"/>
           <p:cNvSpPr txBox="1"/>
           <p:nvPr/>
         </p:nvSpPr>
@@ -18076,7 +18790,7 @@
       </p:sp>
       <p:pic>
         <p:nvPicPr>
-          <p:cNvPr id="5" name="Picture 4" descr="tendance.png"/>
+          <p:cNvPr id="6" name="Picture 5" descr="tendance.png"/>
           <p:cNvPicPr>
             <a:picLocks noChangeAspect="1"/>
           </p:cNvPicPr>
@@ -18100,7 +18814,7 @@
       </p:pic>
       <p:graphicFrame>
         <p:nvGraphicFramePr>
-          <p:cNvPr id="6" name="Table 5"/>
+          <p:cNvPr id="7" name="Table 6"/>
           <p:cNvGraphicFramePr>
             <a:graphicFrameLocks noGrp="1"/>
           </p:cNvGraphicFramePr>
@@ -18715,7 +19429,46 @@
       <p:grpSpPr/>
       <p:sp>
         <p:nvSpPr>
-          <p:cNvPr id="2" name="Rectangle 1"/>
+          <p:cNvPr id="2" name="TextBox 1"/>
+          <p:cNvSpPr txBox="1"/>
+          <p:nvPr/>
+        </p:nvSpPr>
+        <p:spPr>
+          <a:xfrm>
+            <a:off x="11520000" y="6390000"/>
+            <a:ext cx="503999" cy="251999"/>
+          </a:xfrm>
+          <a:prstGeom prst="rect">
+            <a:avLst/>
+          </a:prstGeom>
+          <a:noFill/>
+        </p:spPr>
+        <p:txBody>
+          <a:bodyPr wrap="square">
+            <a:spAutoFit/>
+          </a:bodyPr>
+          <a:lstStyle/>
+          <a:p>
+            <a:pPr algn="r">
+              <a:lnSpc>
+                <a:spcPct val="125000"/>
+              </a:lnSpc>
+            </a:pPr>
+            <a:r>
+              <a:rPr sz="900" b="0">
+                <a:solidFill>
+                  <a:srgbClr val="6B6963"/>
+                </a:solidFill>
+                <a:latin typeface="Calibri"/>
+              </a:rPr>
+              <a:t>3</a:t>
+            </a:r>
+          </a:p>
+        </p:txBody>
+      </p:sp>
+      <p:sp>
+        <p:nvSpPr>
+          <p:cNvPr id="3" name="Rectangle 2"/>
           <p:cNvSpPr/>
           <p:nvPr/>
         </p:nvSpPr>
@@ -18759,7 +19512,7 @@
       </p:sp>
       <p:sp>
         <p:nvSpPr>
-          <p:cNvPr id="3" name="TextBox 2"/>
+          <p:cNvPr id="4" name="TextBox 3"/>
           <p:cNvSpPr txBox="1"/>
           <p:nvPr/>
         </p:nvSpPr>
@@ -18798,7 +19551,7 @@
       </p:sp>
       <p:sp>
         <p:nvSpPr>
-          <p:cNvPr id="4" name="TextBox 3"/>
+          <p:cNvPr id="5" name="TextBox 4"/>
           <p:cNvSpPr txBox="1"/>
           <p:nvPr/>
         </p:nvSpPr>
@@ -18837,7 +19590,7 @@
       </p:sp>
       <p:pic>
         <p:nvPicPr>
-          <p:cNvPr id="5" name="Picture 4" descr="03_feux-par-jour-de-l-annee-cumul-sur-53-ans.png"/>
+          <p:cNvPr id="6" name="Picture 5" descr="03_feux-par-jour-de-l-annee-cumul-sur-53-ans.png"/>
           <p:cNvPicPr>
             <a:picLocks noChangeAspect="1"/>
           </p:cNvPicPr>
@@ -18861,7 +19614,7 @@
       </p:pic>
       <p:sp>
         <p:nvSpPr>
-          <p:cNvPr id="6" name="TextBox 5"/>
+          <p:cNvPr id="7" name="TextBox 6"/>
           <p:cNvSpPr txBox="1"/>
           <p:nvPr/>
         </p:nvSpPr>
@@ -18900,7 +19653,7 @@
       </p:sp>
       <p:sp>
         <p:nvSpPr>
-          <p:cNvPr id="7" name="TextBox 6"/>
+          <p:cNvPr id="8" name="TextBox 7"/>
           <p:cNvSpPr txBox="1"/>
           <p:nvPr/>
         </p:nvSpPr>
@@ -18939,7 +19692,7 @@
       </p:sp>
       <p:sp>
         <p:nvSpPr>
-          <p:cNvPr id="8" name="TextBox 7"/>
+          <p:cNvPr id="9" name="TextBox 8"/>
           <p:cNvSpPr txBox="1"/>
           <p:nvPr/>
         </p:nvSpPr>
@@ -18978,7 +19731,7 @@
       </p:sp>
       <p:sp>
         <p:nvSpPr>
-          <p:cNvPr id="9" name="TextBox 8"/>
+          <p:cNvPr id="10" name="TextBox 9"/>
           <p:cNvSpPr txBox="1"/>
           <p:nvPr/>
         </p:nvSpPr>
@@ -19017,7 +19770,7 @@
       </p:sp>
       <p:sp>
         <p:nvSpPr>
-          <p:cNvPr id="10" name="TextBox 9"/>
+          <p:cNvPr id="11" name="TextBox 10"/>
           <p:cNvSpPr txBox="1"/>
           <p:nvPr/>
         </p:nvSpPr>
@@ -19088,6 +19841,45 @@
         </p:nvSpPr>
         <p:spPr>
           <a:xfrm>
+            <a:off x="11520000" y="6390000"/>
+            <a:ext cx="503999" cy="251999"/>
+          </a:xfrm>
+          <a:prstGeom prst="rect">
+            <a:avLst/>
+          </a:prstGeom>
+          <a:noFill/>
+        </p:spPr>
+        <p:txBody>
+          <a:bodyPr wrap="square">
+            <a:spAutoFit/>
+          </a:bodyPr>
+          <a:lstStyle/>
+          <a:p>
+            <a:pPr algn="r">
+              <a:lnSpc>
+                <a:spcPct val="125000"/>
+              </a:lnSpc>
+            </a:pPr>
+            <a:r>
+              <a:rPr sz="900" b="0">
+                <a:solidFill>
+                  <a:srgbClr val="C3C2B7"/>
+                </a:solidFill>
+                <a:latin typeface="Calibri"/>
+              </a:rPr>
+              <a:t>30</a:t>
+            </a:r>
+          </a:p>
+        </p:txBody>
+      </p:sp>
+      <p:sp>
+        <p:nvSpPr>
+          <p:cNvPr id="3" name="TextBox 2"/>
+          <p:cNvSpPr txBox="1"/>
+          <p:nvPr/>
+        </p:nvSpPr>
+        <p:spPr>
+          <a:xfrm>
             <a:off x="684000" y="2268000"/>
             <a:ext cx="2160000" cy="503999"/>
           </a:xfrm>
@@ -19121,7 +19913,7 @@
       </p:sp>
       <p:sp>
         <p:nvSpPr>
-          <p:cNvPr id="3" name="TextBox 2"/>
+          <p:cNvPr id="4" name="TextBox 3"/>
           <p:cNvSpPr txBox="1"/>
           <p:nvPr/>
         </p:nvSpPr>
@@ -19160,7 +19952,7 @@
       </p:sp>
       <p:sp>
         <p:nvSpPr>
-          <p:cNvPr id="4" name="TextBox 3"/>
+          <p:cNvPr id="5" name="TextBox 4"/>
           <p:cNvSpPr txBox="1"/>
           <p:nvPr/>
         </p:nvSpPr>
@@ -19225,7 +20017,46 @@
       <p:grpSpPr/>
       <p:sp>
         <p:nvSpPr>
-          <p:cNvPr id="2" name="Rectangle 1"/>
+          <p:cNvPr id="2" name="TextBox 1"/>
+          <p:cNvSpPr txBox="1"/>
+          <p:nvPr/>
+        </p:nvSpPr>
+        <p:spPr>
+          <a:xfrm>
+            <a:off x="11520000" y="6390000"/>
+            <a:ext cx="503999" cy="251999"/>
+          </a:xfrm>
+          <a:prstGeom prst="rect">
+            <a:avLst/>
+          </a:prstGeom>
+          <a:noFill/>
+        </p:spPr>
+        <p:txBody>
+          <a:bodyPr wrap="square">
+            <a:spAutoFit/>
+          </a:bodyPr>
+          <a:lstStyle/>
+          <a:p>
+            <a:pPr algn="r">
+              <a:lnSpc>
+                <a:spcPct val="125000"/>
+              </a:lnSpc>
+            </a:pPr>
+            <a:r>
+              <a:rPr sz="900" b="0">
+                <a:solidFill>
+                  <a:srgbClr val="6B6963"/>
+                </a:solidFill>
+                <a:latin typeface="Calibri"/>
+              </a:rPr>
+              <a:t>31</a:t>
+            </a:r>
+          </a:p>
+        </p:txBody>
+      </p:sp>
+      <p:sp>
+        <p:nvSpPr>
+          <p:cNvPr id="3" name="Rectangle 2"/>
           <p:cNvSpPr/>
           <p:nvPr/>
         </p:nvSpPr>
@@ -19269,7 +20100,7 @@
       </p:sp>
       <p:sp>
         <p:nvSpPr>
-          <p:cNvPr id="3" name="TextBox 2"/>
+          <p:cNvPr id="4" name="TextBox 3"/>
           <p:cNvSpPr txBox="1"/>
           <p:nvPr/>
         </p:nvSpPr>
@@ -19308,7 +20139,7 @@
       </p:sp>
       <p:sp>
         <p:nvSpPr>
-          <p:cNvPr id="4" name="TextBox 3"/>
+          <p:cNvPr id="5" name="TextBox 4"/>
           <p:cNvSpPr txBox="1"/>
           <p:nvPr/>
         </p:nvSpPr>
@@ -19347,7 +20178,7 @@
       </p:sp>
       <p:pic>
         <p:nvPicPr>
-          <p:cNvPr id="5" name="Picture 4" descr="shap_c.png"/>
+          <p:cNvPr id="6" name="Picture 5" descr="shap_c.png"/>
           <p:cNvPicPr>
             <a:picLocks noChangeAspect="1"/>
           </p:cNvPicPr>
@@ -19371,7 +20202,7 @@
       </p:pic>
       <p:sp>
         <p:nvSpPr>
-          <p:cNvPr id="6" name="Rectangle 5"/>
+          <p:cNvPr id="7" name="Rectangle 6"/>
           <p:cNvSpPr/>
           <p:nvPr/>
         </p:nvSpPr>
@@ -19415,7 +20246,7 @@
       </p:sp>
       <p:sp>
         <p:nvSpPr>
-          <p:cNvPr id="7" name="TextBox 6"/>
+          <p:cNvPr id="8" name="TextBox 7"/>
           <p:cNvSpPr txBox="1"/>
           <p:nvPr/>
         </p:nvSpPr>
@@ -19496,7 +20327,46 @@
       <p:grpSpPr/>
       <p:sp>
         <p:nvSpPr>
-          <p:cNvPr id="2" name="Rectangle 1"/>
+          <p:cNvPr id="2" name="TextBox 1"/>
+          <p:cNvSpPr txBox="1"/>
+          <p:nvPr/>
+        </p:nvSpPr>
+        <p:spPr>
+          <a:xfrm>
+            <a:off x="11520000" y="6390000"/>
+            <a:ext cx="503999" cy="251999"/>
+          </a:xfrm>
+          <a:prstGeom prst="rect">
+            <a:avLst/>
+          </a:prstGeom>
+          <a:noFill/>
+        </p:spPr>
+        <p:txBody>
+          <a:bodyPr wrap="square">
+            <a:spAutoFit/>
+          </a:bodyPr>
+          <a:lstStyle/>
+          <a:p>
+            <a:pPr algn="r">
+              <a:lnSpc>
+                <a:spcPct val="125000"/>
+              </a:lnSpc>
+            </a:pPr>
+            <a:r>
+              <a:rPr sz="900" b="0">
+                <a:solidFill>
+                  <a:srgbClr val="6B6963"/>
+                </a:solidFill>
+                <a:latin typeface="Calibri"/>
+              </a:rPr>
+              <a:t>32</a:t>
+            </a:r>
+          </a:p>
+        </p:txBody>
+      </p:sp>
+      <p:sp>
+        <p:nvSpPr>
+          <p:cNvPr id="3" name="Rectangle 2"/>
           <p:cNvSpPr/>
           <p:nvPr/>
         </p:nvSpPr>
@@ -19540,7 +20410,7 @@
       </p:sp>
       <p:sp>
         <p:nvSpPr>
-          <p:cNvPr id="3" name="TextBox 2"/>
+          <p:cNvPr id="4" name="TextBox 3"/>
           <p:cNvSpPr txBox="1"/>
           <p:nvPr/>
         </p:nvSpPr>
@@ -19579,7 +20449,7 @@
       </p:sp>
       <p:sp>
         <p:nvSpPr>
-          <p:cNvPr id="4" name="TextBox 3"/>
+          <p:cNvPr id="5" name="TextBox 4"/>
           <p:cNvSpPr txBox="1"/>
           <p:nvPr/>
         </p:nvSpPr>
@@ -19618,7 +20488,7 @@
       </p:sp>
       <p:sp>
         <p:nvSpPr>
-          <p:cNvPr id="5" name="TextBox 4"/>
+          <p:cNvPr id="6" name="TextBox 5"/>
           <p:cNvSpPr txBox="1"/>
           <p:nvPr/>
         </p:nvSpPr>
@@ -19657,7 +20527,7 @@
       </p:sp>
       <p:sp>
         <p:nvSpPr>
-          <p:cNvPr id="6" name="TextBox 5"/>
+          <p:cNvPr id="7" name="TextBox 6"/>
           <p:cNvSpPr txBox="1"/>
           <p:nvPr/>
         </p:nvSpPr>
@@ -19696,7 +20566,7 @@
       </p:sp>
       <p:sp>
         <p:nvSpPr>
-          <p:cNvPr id="7" name="TextBox 6"/>
+          <p:cNvPr id="8" name="TextBox 7"/>
           <p:cNvSpPr txBox="1"/>
           <p:nvPr/>
         </p:nvSpPr>
@@ -19735,7 +20605,7 @@
       </p:sp>
       <p:sp>
         <p:nvSpPr>
-          <p:cNvPr id="8" name="TextBox 7"/>
+          <p:cNvPr id="9" name="TextBox 8"/>
           <p:cNvSpPr txBox="1"/>
           <p:nvPr/>
         </p:nvSpPr>
@@ -19774,20 +20644,20 @@
       </p:sp>
       <p:sp>
         <p:nvSpPr>
-          <p:cNvPr id="9" name="Rectangle 8"/>
+          <p:cNvPr id="10" name="Rectangle 9"/>
           <p:cNvSpPr/>
           <p:nvPr/>
         </p:nvSpPr>
         <p:spPr>
           <a:xfrm>
             <a:off x="684000" y="4254076"/>
-            <a:ext cx="39600" cy="1872000"/>
+            <a:ext cx="39600" cy="936000"/>
           </a:xfrm>
           <a:prstGeom prst="rect">
             <a:avLst/>
           </a:prstGeom>
           <a:solidFill>
-            <a:srgbClr val="2A78D6"/>
+            <a:srgbClr val="EB6834"/>
           </a:solidFill>
           <a:ln>
             <a:noFill/>
@@ -19818,129 +20688,14 @@
       </p:sp>
       <p:sp>
         <p:nvSpPr>
-          <p:cNvPr id="10" name="TextBox 9"/>
+          <p:cNvPr id="11" name="TextBox 10"/>
           <p:cNvSpPr txBox="1"/>
           <p:nvPr/>
         </p:nvSpPr>
         <p:spPr>
           <a:xfrm>
             <a:off x="882000" y="4290076"/>
-            <a:ext cx="10548000" cy="1872000"/>
-          </a:xfrm>
-          <a:prstGeom prst="rect">
-            <a:avLst/>
-          </a:prstGeom>
-          <a:noFill/>
-        </p:spPr>
-        <p:txBody>
-          <a:bodyPr wrap="square">
-            <a:spAutoFit/>
-          </a:bodyPr>
-          <a:lstStyle/>
-          <a:p>
-            <a:pPr>
-              <a:lnSpc>
-                <a:spcPct val="130000"/>
-              </a:lnSpc>
-            </a:pPr>
-            <a:r>
-              <a:rPr sz="1400" b="0">
-                <a:solidFill>
-                  <a:srgbClr val="0B0B0B"/>
-                </a:solidFill>
-                <a:latin typeface="Calibri"/>
-              </a:rPr>
-              <a:t>Un détail d'implémentation qui change tout</a:t>
-            </a:r>
-          </a:p>
-          <a:p>
-            <a:pPr>
-              <a:lnSpc>
-                <a:spcPct val="130000"/>
-              </a:lnSpc>
-            </a:pPr>
-            <a:r>
-              <a:rPr sz="1400" b="0">
-                <a:solidFill>
-                  <a:srgbClr val="0B0B0B"/>
-                </a:solidFill>
-                <a:latin typeface="Calibri"/>
-              </a:rPr>
-              <a:t>DiCE cherche par défaut à faire passer la probabilité sous 0,5. Or le score n'est pas calibré : 0,5 correspond à un risque astronomique, et l'outil ne renvoyait jamais rien.</a:t>
-            </a:r>
-          </a:p>
-          <a:p>
-            <a:pPr>
-              <a:lnSpc>
-                <a:spcPct val="130000"/>
-              </a:lnSpc>
-            </a:pPr>
-            <a:r>
-              <a:rPr sz="1400" b="0">
-                <a:solidFill>
-                  <a:srgbClr val="0B0B0B"/>
-                </a:solidFill>
-                <a:latin typeface="Calibri"/>
-              </a:rPr>
-              <a:t>On a recentré la frontière sur le décile, par une transformation strictement croissante qui laisse le classement intact. La question devient « que faudrait-il pour sortir des 10 % les plus à risque », celle qui a un sens opérationnel.</a:t>
-            </a:r>
-          </a:p>
-        </p:txBody>
-      </p:sp>
-      <p:sp>
-        <p:nvSpPr>
-          <p:cNvPr id="11" name="Rectangle 10"/>
-          <p:cNvSpPr/>
-          <p:nvPr/>
-        </p:nvSpPr>
-        <p:spPr>
-          <a:xfrm>
-            <a:off x="684000" y="6270076"/>
-            <a:ext cx="39600" cy="1007999"/>
-          </a:xfrm>
-          <a:prstGeom prst="rect">
-            <a:avLst/>
-          </a:prstGeom>
-          <a:solidFill>
-            <a:srgbClr val="EB6834"/>
-          </a:solidFill>
-          <a:ln>
-            <a:noFill/>
-          </a:ln>
-          <a:effectLst/>
-        </p:spPr>
-        <p:style>
-          <a:lnRef idx="1">
-            <a:schemeClr val="accent1"/>
-          </a:lnRef>
-          <a:fillRef idx="3">
-            <a:schemeClr val="accent1"/>
-          </a:fillRef>
-          <a:effectRef idx="2">
-            <a:schemeClr val="accent1"/>
-          </a:effectRef>
-          <a:fontRef idx="minor">
-            <a:schemeClr val="lt1"/>
-          </a:fontRef>
-        </p:style>
-        <p:txBody>
-          <a:bodyPr rtlCol="0" anchor="ctr"/>
-          <a:lstStyle/>
-          <a:p>
-            <a:pPr algn="ctr"/>
-          </a:p>
-        </p:txBody>
-      </p:sp>
-      <p:sp>
-        <p:nvSpPr>
-          <p:cNvPr id="12" name="TextBox 11"/>
-          <p:cNvSpPr txBox="1"/>
-          <p:nvPr/>
-        </p:nvSpPr>
-        <p:spPr>
-          <a:xfrm>
-            <a:off x="882000" y="6306076"/>
-            <a:ext cx="10548000" cy="1007999"/>
+            <a:ext cx="10548000" cy="936000"/>
           </a:xfrm>
           <a:prstGeom prst="rect">
             <a:avLst/>
@@ -19998,7 +20753,46 @@
       <p:grpSpPr/>
       <p:sp>
         <p:nvSpPr>
-          <p:cNvPr id="2" name="Rectangle 1"/>
+          <p:cNvPr id="2" name="TextBox 1"/>
+          <p:cNvSpPr txBox="1"/>
+          <p:nvPr/>
+        </p:nvSpPr>
+        <p:spPr>
+          <a:xfrm>
+            <a:off x="11520000" y="6390000"/>
+            <a:ext cx="503999" cy="251999"/>
+          </a:xfrm>
+          <a:prstGeom prst="rect">
+            <a:avLst/>
+          </a:prstGeom>
+          <a:noFill/>
+        </p:spPr>
+        <p:txBody>
+          <a:bodyPr wrap="square">
+            <a:spAutoFit/>
+          </a:bodyPr>
+          <a:lstStyle/>
+          <a:p>
+            <a:pPr algn="r">
+              <a:lnSpc>
+                <a:spcPct val="125000"/>
+              </a:lnSpc>
+            </a:pPr>
+            <a:r>
+              <a:rPr sz="900" b="0">
+                <a:solidFill>
+                  <a:srgbClr val="6B6963"/>
+                </a:solidFill>
+                <a:latin typeface="Calibri"/>
+              </a:rPr>
+              <a:t>33</a:t>
+            </a:r>
+          </a:p>
+        </p:txBody>
+      </p:sp>
+      <p:sp>
+        <p:nvSpPr>
+          <p:cNvPr id="3" name="Rectangle 2"/>
           <p:cNvSpPr/>
           <p:nvPr/>
         </p:nvSpPr>
@@ -20042,7 +20836,7 @@
       </p:sp>
       <p:sp>
         <p:nvSpPr>
-          <p:cNvPr id="3" name="TextBox 2"/>
+          <p:cNvPr id="4" name="TextBox 3"/>
           <p:cNvSpPr txBox="1"/>
           <p:nvPr/>
         </p:nvSpPr>
@@ -20081,7 +20875,7 @@
       </p:sp>
       <p:sp>
         <p:nvSpPr>
-          <p:cNvPr id="4" name="TextBox 3"/>
+          <p:cNvPr id="5" name="TextBox 4"/>
           <p:cNvSpPr txBox="1"/>
           <p:nvPr/>
         </p:nvSpPr>
@@ -20120,7 +20914,7 @@
       </p:sp>
       <p:pic>
         <p:nvPicPr>
-          <p:cNvPr id="5" name="Picture 4" descr="02_le-risque-de-fond-en-2041-2055-a-vegetation-relief-et-preven.png"/>
+          <p:cNvPr id="6" name="Picture 5" descr="02_le-risque-de-fond-en-2041-2055-a-vegetation-relief-et-preven.png"/>
           <p:cNvPicPr>
             <a:picLocks noChangeAspect="1"/>
           </p:cNvPicPr>
@@ -20144,7 +20938,7 @@
       </p:pic>
       <p:sp>
         <p:nvSpPr>
-          <p:cNvPr id="6" name="TextBox 5"/>
+          <p:cNvPr id="7" name="TextBox 6"/>
           <p:cNvSpPr txBox="1"/>
           <p:nvPr/>
         </p:nvSpPr>
@@ -20183,7 +20977,7 @@
       </p:sp>
       <p:sp>
         <p:nvSpPr>
-          <p:cNvPr id="7" name="TextBox 6"/>
+          <p:cNvPr id="8" name="TextBox 7"/>
           <p:cNvSpPr txBox="1"/>
           <p:nvPr/>
         </p:nvSpPr>
@@ -20222,7 +21016,7 @@
       </p:sp>
       <p:sp>
         <p:nvSpPr>
-          <p:cNvPr id="8" name="TextBox 7"/>
+          <p:cNvPr id="9" name="TextBox 8"/>
           <p:cNvSpPr txBox="1"/>
           <p:nvPr/>
         </p:nvSpPr>
@@ -20261,7 +21055,7 @@
       </p:sp>
       <p:sp>
         <p:nvSpPr>
-          <p:cNvPr id="9" name="TextBox 8"/>
+          <p:cNvPr id="10" name="TextBox 9"/>
           <p:cNvSpPr txBox="1"/>
           <p:nvPr/>
         </p:nvSpPr>
@@ -20300,7 +21094,7 @@
       </p:sp>
       <p:sp>
         <p:nvSpPr>
-          <p:cNvPr id="10" name="TextBox 9"/>
+          <p:cNvPr id="11" name="TextBox 10"/>
           <p:cNvSpPr txBox="1"/>
           <p:nvPr/>
         </p:nvSpPr>
@@ -20339,7 +21133,7 @@
       </p:sp>
       <p:sp>
         <p:nvSpPr>
-          <p:cNvPr id="11" name="TextBox 10"/>
+          <p:cNvPr id="12" name="TextBox 11"/>
           <p:cNvSpPr txBox="1"/>
           <p:nvPr/>
         </p:nvSpPr>
@@ -20378,7 +21172,7 @@
       </p:sp>
       <p:sp>
         <p:nvSpPr>
-          <p:cNvPr id="12" name="TextBox 11"/>
+          <p:cNvPr id="13" name="TextBox 12"/>
           <p:cNvSpPr txBox="1"/>
           <p:nvPr/>
         </p:nvSpPr>
@@ -20417,7 +21211,7 @@
       </p:sp>
       <p:sp>
         <p:nvSpPr>
-          <p:cNvPr id="13" name="TextBox 12"/>
+          <p:cNvPr id="14" name="TextBox 13"/>
           <p:cNvSpPr txBox="1"/>
           <p:nvPr/>
         </p:nvSpPr>
@@ -20482,7 +21276,46 @@
       <p:grpSpPr/>
       <p:sp>
         <p:nvSpPr>
-          <p:cNvPr id="2" name="Rectangle 1"/>
+          <p:cNvPr id="2" name="TextBox 1"/>
+          <p:cNvSpPr txBox="1"/>
+          <p:nvPr/>
+        </p:nvSpPr>
+        <p:spPr>
+          <a:xfrm>
+            <a:off x="11520000" y="6390000"/>
+            <a:ext cx="503999" cy="251999"/>
+          </a:xfrm>
+          <a:prstGeom prst="rect">
+            <a:avLst/>
+          </a:prstGeom>
+          <a:noFill/>
+        </p:spPr>
+        <p:txBody>
+          <a:bodyPr wrap="square">
+            <a:spAutoFit/>
+          </a:bodyPr>
+          <a:lstStyle/>
+          <a:p>
+            <a:pPr algn="r">
+              <a:lnSpc>
+                <a:spcPct val="125000"/>
+              </a:lnSpc>
+            </a:pPr>
+            <a:r>
+              <a:rPr sz="900" b="0">
+                <a:solidFill>
+                  <a:srgbClr val="6B6963"/>
+                </a:solidFill>
+                <a:latin typeface="Calibri"/>
+              </a:rPr>
+              <a:t>34</a:t>
+            </a:r>
+          </a:p>
+        </p:txBody>
+      </p:sp>
+      <p:sp>
+        <p:nvSpPr>
+          <p:cNvPr id="3" name="Rectangle 2"/>
           <p:cNvSpPr/>
           <p:nvPr/>
         </p:nvSpPr>
@@ -20526,7 +21359,7 @@
       </p:sp>
       <p:sp>
         <p:nvSpPr>
-          <p:cNvPr id="3" name="TextBox 2"/>
+          <p:cNvPr id="4" name="TextBox 3"/>
           <p:cNvSpPr txBox="1"/>
           <p:nvPr/>
         </p:nvSpPr>
@@ -20565,7 +21398,7 @@
       </p:sp>
       <p:sp>
         <p:nvSpPr>
-          <p:cNvPr id="4" name="TextBox 3"/>
+          <p:cNvPr id="5" name="TextBox 4"/>
           <p:cNvSpPr txBox="1"/>
           <p:nvPr/>
         </p:nvSpPr>
@@ -20604,7 +21437,7 @@
       </p:sp>
       <p:pic>
         <p:nvPicPr>
-          <p:cNvPr id="5" name="Picture 4" descr="alignement.png"/>
+          <p:cNvPr id="6" name="Picture 5" descr="alignement.png"/>
           <p:cNvPicPr>
             <a:picLocks noChangeAspect="1"/>
           </p:cNvPicPr>
@@ -20628,7 +21461,7 @@
       </p:pic>
       <p:sp>
         <p:nvSpPr>
-          <p:cNvPr id="6" name="TextBox 5"/>
+          <p:cNvPr id="7" name="TextBox 6"/>
           <p:cNvSpPr txBox="1"/>
           <p:nvPr/>
         </p:nvSpPr>
@@ -20667,7 +21500,7 @@
       </p:sp>
       <p:sp>
         <p:nvSpPr>
-          <p:cNvPr id="7" name="TextBox 6"/>
+          <p:cNvPr id="8" name="TextBox 7"/>
           <p:cNvSpPr txBox="1"/>
           <p:nvPr/>
         </p:nvSpPr>
@@ -20706,7 +21539,7 @@
       </p:sp>
       <p:sp>
         <p:nvSpPr>
-          <p:cNvPr id="8" name="TextBox 7"/>
+          <p:cNvPr id="9" name="TextBox 8"/>
           <p:cNvSpPr txBox="1"/>
           <p:nvPr/>
         </p:nvSpPr>
@@ -20745,7 +21578,7 @@
       </p:sp>
       <p:sp>
         <p:nvSpPr>
-          <p:cNvPr id="9" name="TextBox 8"/>
+          <p:cNvPr id="10" name="TextBox 9"/>
           <p:cNvSpPr txBox="1"/>
           <p:nvPr/>
         </p:nvSpPr>
@@ -20784,7 +21617,7 @@
       </p:sp>
       <p:graphicFrame>
         <p:nvGraphicFramePr>
-          <p:cNvPr id="10" name="Table 9"/>
+          <p:cNvPr id="11" name="Table 10"/>
           <p:cNvGraphicFramePr>
             <a:graphicFrameLocks noGrp="1"/>
           </p:cNvGraphicFramePr>
@@ -21112,7 +21945,46 @@
       <p:grpSpPr/>
       <p:sp>
         <p:nvSpPr>
-          <p:cNvPr id="2" name="Rectangle 1"/>
+          <p:cNvPr id="2" name="TextBox 1"/>
+          <p:cNvSpPr txBox="1"/>
+          <p:nvPr/>
+        </p:nvSpPr>
+        <p:spPr>
+          <a:xfrm>
+            <a:off x="11520000" y="6390000"/>
+            <a:ext cx="503999" cy="251999"/>
+          </a:xfrm>
+          <a:prstGeom prst="rect">
+            <a:avLst/>
+          </a:prstGeom>
+          <a:noFill/>
+        </p:spPr>
+        <p:txBody>
+          <a:bodyPr wrap="square">
+            <a:spAutoFit/>
+          </a:bodyPr>
+          <a:lstStyle/>
+          <a:p>
+            <a:pPr algn="r">
+              <a:lnSpc>
+                <a:spcPct val="125000"/>
+              </a:lnSpc>
+            </a:pPr>
+            <a:r>
+              <a:rPr sz="900" b="0">
+                <a:solidFill>
+                  <a:srgbClr val="6B6963"/>
+                </a:solidFill>
+                <a:latin typeface="Calibri"/>
+              </a:rPr>
+              <a:t>35</a:t>
+            </a:r>
+          </a:p>
+        </p:txBody>
+      </p:sp>
+      <p:sp>
+        <p:nvSpPr>
+          <p:cNvPr id="3" name="Rectangle 2"/>
           <p:cNvSpPr/>
           <p:nvPr/>
         </p:nvSpPr>
@@ -21156,7 +22028,7 @@
       </p:sp>
       <p:sp>
         <p:nvSpPr>
-          <p:cNvPr id="3" name="TextBox 2"/>
+          <p:cNvPr id="4" name="TextBox 3"/>
           <p:cNvSpPr txBox="1"/>
           <p:nvPr/>
         </p:nvSpPr>
@@ -21195,7 +22067,7 @@
       </p:sp>
       <p:sp>
         <p:nvSpPr>
-          <p:cNvPr id="4" name="TextBox 3"/>
+          <p:cNvPr id="5" name="TextBox 4"/>
           <p:cNvSpPr txBox="1"/>
           <p:nvPr/>
         </p:nvSpPr>
@@ -21234,7 +22106,7 @@
       </p:sp>
       <p:sp>
         <p:nvSpPr>
-          <p:cNvPr id="5" name="TextBox 4"/>
+          <p:cNvPr id="6" name="TextBox 5"/>
           <p:cNvSpPr txBox="1"/>
           <p:nvPr/>
         </p:nvSpPr>
@@ -21273,7 +22145,7 @@
       </p:sp>
       <p:sp>
         <p:nvSpPr>
-          <p:cNvPr id="6" name="TextBox 5"/>
+          <p:cNvPr id="7" name="TextBox 6"/>
           <p:cNvSpPr txBox="1"/>
           <p:nvPr/>
         </p:nvSpPr>
@@ -21312,7 +22184,7 @@
       </p:sp>
       <p:sp>
         <p:nvSpPr>
-          <p:cNvPr id="7" name="TextBox 6"/>
+          <p:cNvPr id="8" name="TextBox 7"/>
           <p:cNvSpPr txBox="1"/>
           <p:nvPr/>
         </p:nvSpPr>
@@ -21351,14 +22223,14 @@
       </p:sp>
       <p:sp>
         <p:nvSpPr>
-          <p:cNvPr id="8" name="TextBox 7"/>
+          <p:cNvPr id="9" name="TextBox 8"/>
           <p:cNvSpPr txBox="1"/>
           <p:nvPr/>
         </p:nvSpPr>
         <p:spPr>
           <a:xfrm>
             <a:off x="684000" y="3444336"/>
-            <a:ext cx="10800000" cy="571536"/>
+            <a:ext cx="10800000" cy="453600"/>
           </a:xfrm>
           <a:prstGeom prst="rect">
             <a:avLst/>
@@ -21383,20 +22255,20 @@
                 </a:solidFill>
                 <a:latin typeface="Calibri"/>
               </a:rPr>
-              <a:t>· lift de 2.9× seulement, contre 63.7× pour les départs. On lit parfois « ROC-AUC 0,77 » : c'est exact, mais s'en servir après avoir expliqué pourquoi la ROC-AUC flatte serait se contredire.</a:t>
-            </a:r>
-          </a:p>
-        </p:txBody>
-      </p:sp>
-      <p:sp>
-        <p:nvSpPr>
-          <p:cNvPr id="9" name="TextBox 8"/>
+              <a:t>· lift de 2.9× seulement, contre 63.7× pour les départs.</a:t>
+            </a:r>
+          </a:p>
+        </p:txBody>
+      </p:sp>
+      <p:sp>
+        <p:nvSpPr>
+          <p:cNvPr id="10" name="TextBox 9"/>
           <p:cNvSpPr txBox="1"/>
           <p:nvPr/>
         </p:nvSpPr>
         <p:spPr>
           <a:xfrm>
-            <a:off x="684000" y="4037472"/>
+            <a:off x="684000" y="3897936"/>
             <a:ext cx="10800000" cy="453600"/>
           </a:xfrm>
           <a:prstGeom prst="rect">
@@ -21429,13 +22301,13 @@
       </p:sp>
       <p:sp>
         <p:nvSpPr>
-          <p:cNvPr id="10" name="TextBox 9"/>
+          <p:cNvPr id="11" name="TextBox 10"/>
           <p:cNvSpPr txBox="1"/>
           <p:nvPr/>
         </p:nvSpPr>
         <p:spPr>
           <a:xfrm>
-            <a:off x="684000" y="4491072"/>
+            <a:off x="684000" y="4351536"/>
             <a:ext cx="10800000" cy="453600"/>
           </a:xfrm>
           <a:prstGeom prst="rect">
@@ -21468,13 +22340,13 @@
       </p:sp>
       <p:sp>
         <p:nvSpPr>
-          <p:cNvPr id="11" name="TextBox 10"/>
+          <p:cNvPr id="12" name="TextBox 11"/>
           <p:cNvSpPr txBox="1"/>
           <p:nvPr/>
         </p:nvSpPr>
         <p:spPr>
           <a:xfrm>
-            <a:off x="684000" y="4944672"/>
+            <a:off x="684000" y="4805136"/>
             <a:ext cx="10800000" cy="453600"/>
           </a:xfrm>
           <a:prstGeom prst="rect">
@@ -21507,13 +22379,13 @@
       </p:sp>
       <p:sp>
         <p:nvSpPr>
-          <p:cNvPr id="12" name="TextBox 11"/>
+          <p:cNvPr id="13" name="TextBox 12"/>
           <p:cNvSpPr txBox="1"/>
           <p:nvPr/>
         </p:nvSpPr>
         <p:spPr>
           <a:xfrm>
-            <a:off x="684000" y="5398272"/>
+            <a:off x="684000" y="5258736"/>
             <a:ext cx="10800000" cy="453600"/>
           </a:xfrm>
           <a:prstGeom prst="rect">
@@ -21546,13 +22418,13 @@
       </p:sp>
       <p:sp>
         <p:nvSpPr>
-          <p:cNvPr id="13" name="TextBox 12"/>
+          <p:cNvPr id="14" name="TextBox 13"/>
           <p:cNvSpPr txBox="1"/>
           <p:nvPr/>
         </p:nvSpPr>
         <p:spPr>
           <a:xfrm>
-            <a:off x="684000" y="5851872"/>
+            <a:off x="684000" y="5712336"/>
             <a:ext cx="10800000" cy="453600"/>
           </a:xfrm>
           <a:prstGeom prst="rect">
@@ -21585,13 +22457,13 @@
       </p:sp>
       <p:sp>
         <p:nvSpPr>
-          <p:cNvPr id="14" name="TextBox 13"/>
+          <p:cNvPr id="15" name="TextBox 14"/>
           <p:cNvSpPr txBox="1"/>
           <p:nvPr/>
         </p:nvSpPr>
         <p:spPr>
           <a:xfrm>
-            <a:off x="684000" y="6305472"/>
+            <a:off x="684000" y="6165936"/>
             <a:ext cx="10800000" cy="571536"/>
           </a:xfrm>
           <a:prstGeom prst="rect">
@@ -21650,7 +22522,46 @@
       <p:grpSpPr/>
       <p:sp>
         <p:nvSpPr>
-          <p:cNvPr id="2" name="Rectangle 1"/>
+          <p:cNvPr id="2" name="TextBox 1"/>
+          <p:cNvSpPr txBox="1"/>
+          <p:nvPr/>
+        </p:nvSpPr>
+        <p:spPr>
+          <a:xfrm>
+            <a:off x="11520000" y="6390000"/>
+            <a:ext cx="503999" cy="251999"/>
+          </a:xfrm>
+          <a:prstGeom prst="rect">
+            <a:avLst/>
+          </a:prstGeom>
+          <a:noFill/>
+        </p:spPr>
+        <p:txBody>
+          <a:bodyPr wrap="square">
+            <a:spAutoFit/>
+          </a:bodyPr>
+          <a:lstStyle/>
+          <a:p>
+            <a:pPr algn="r">
+              <a:lnSpc>
+                <a:spcPct val="125000"/>
+              </a:lnSpc>
+            </a:pPr>
+            <a:r>
+              <a:rPr sz="900" b="0">
+                <a:solidFill>
+                  <a:srgbClr val="6B6963"/>
+                </a:solidFill>
+                <a:latin typeface="Calibri"/>
+              </a:rPr>
+              <a:t>36</a:t>
+            </a:r>
+          </a:p>
+        </p:txBody>
+      </p:sp>
+      <p:sp>
+        <p:nvSpPr>
+          <p:cNvPr id="3" name="Rectangle 2"/>
           <p:cNvSpPr/>
           <p:nvPr/>
         </p:nvSpPr>
@@ -21694,7 +22605,7 @@
       </p:sp>
       <p:sp>
         <p:nvSpPr>
-          <p:cNvPr id="3" name="TextBox 2"/>
+          <p:cNvPr id="4" name="TextBox 3"/>
           <p:cNvSpPr txBox="1"/>
           <p:nvPr/>
         </p:nvSpPr>
@@ -21733,7 +22644,7 @@
       </p:sp>
       <p:sp>
         <p:nvSpPr>
-          <p:cNvPr id="4" name="TextBox 3"/>
+          <p:cNvPr id="5" name="TextBox 4"/>
           <p:cNvSpPr txBox="1"/>
           <p:nvPr/>
         </p:nvSpPr>
@@ -21772,7 +22683,7 @@
       </p:sp>
       <p:graphicFrame>
         <p:nvGraphicFramePr>
-          <p:cNvPr id="5" name="Table 4"/>
+          <p:cNvPr id="6" name="Table 5"/>
           <p:cNvGraphicFramePr>
             <a:graphicFrameLocks noGrp="1"/>
           </p:cNvGraphicFramePr>
@@ -21780,7 +22691,7 @@
         </p:nvGraphicFramePr>
         <p:xfrm>
           <a:off x="684000" y="1944000"/>
-          <a:ext cx="10800000" cy="2736000"/>
+          <a:ext cx="10800000" cy="2304000"/>
         </p:xfrm>
         <a:graphic>
           <a:graphicData uri="http://schemas.openxmlformats.org/drawingml/2006/table">
@@ -21792,7 +22703,7 @@
                 <a:gridCol w="2520000"/>
                 <a:gridCol w="8280000"/>
               </a:tblGrid>
-              <a:tr h="456000">
+              <a:tr h="384000">
                 <a:tc>
                   <a:txBody>
                     <a:bodyPr/>
@@ -21838,7 +22749,7 @@
                   </a:tcPr>
                 </a:tc>
               </a:tr>
-              <a:tr h="456000">
+              <a:tr h="384000">
                 <a:tc>
                   <a:txBody>
                     <a:bodyPr/>
@@ -21873,7 +22784,7 @@
                           </a:solidFill>
                           <a:latin typeface="Calibri"/>
                         </a:rPr>
-                        <a:t>carte de chaleur nationale sur les 34 696 communes en aplat, 1973 → 2100, 3 scénarios GIEC, et un mode rétrospectif qui compare v3 et C sur le test</a:t>
+                        <a:t>34 696 communes en aplat, 1973 → 2100, 3 scénarios GIEC</a:t>
                       </a:r>
                     </a:p>
                   </a:txBody>
@@ -21884,7 +22795,7 @@
                   </a:tcPr>
                 </a:tc>
               </a:tr>
-              <a:tr h="456000">
+              <a:tr h="384000">
                 <a:tc>
                   <a:txBody>
                     <a:bodyPr/>
@@ -21919,7 +22830,7 @@
                           </a:solidFill>
                           <a:latin typeface="Calibri"/>
                         </a:rPr>
-                        <a:t>fiche détaillée : décennies, projections à échelle fixe, type de territoire</a:t>
+                        <a:t>décennies, projections à échelle fixe, type de territoire</a:t>
                       </a:r>
                     </a:p>
                   </a:txBody>
@@ -21930,7 +22841,7 @@
                   </a:tcPr>
                 </a:tc>
               </a:tr>
-              <a:tr h="456000">
+              <a:tr h="384000">
                 <a:tc>
                   <a:txBody>
                     <a:bodyPr/>
@@ -21965,7 +22876,7 @@
                           </a:solidFill>
                           <a:latin typeface="Calibri"/>
                         </a:rPr>
-                        <a:t>les 4 sources, la tendance sur 53 ans, ADF, ACF/PACF et SARIMAX</a:t>
+                        <a:t>les 4 sources, 53 ans de tendance, ADF, ACF/PACF, SARIMAX</a:t>
                       </a:r>
                     </a:p>
                   </a:txBody>
@@ -21976,7 +22887,7 @@
                   </a:tcPr>
                 </a:tc>
               </a:tr>
-              <a:tr h="456000">
+              <a:tr h="384000">
                 <a:tc>
                   <a:txBody>
                     <a:bodyPr/>
@@ -22011,7 +22922,7 @@
                           </a:solidFill>
                           <a:latin typeface="Calibri"/>
                         </a:rPr>
-                        <a:t>protocole, les modèles et leurs intervalles, le LSTM, v3 contre C, la calibration, le bug d'alignement</a:t>
+                        <a:t>protocole, intervalles, LSTM, v3 contre C, calibration</a:t>
                       </a:r>
                     </a:p>
                   </a:txBody>
@@ -22022,7 +22933,7 @@
                   </a:tcPr>
                 </a:tc>
               </a:tr>
-              <a:tr h="456000">
+              <a:tr h="384000">
                 <a:tc>
                   <a:txBody>
                     <a:bodyPr/>
@@ -22074,14 +22985,14 @@
       </p:graphicFrame>
       <p:sp>
         <p:nvSpPr>
-          <p:cNvPr id="6" name="Rectangle 5"/>
+          <p:cNvPr id="7" name="Rectangle 6"/>
           <p:cNvSpPr/>
           <p:nvPr/>
         </p:nvSpPr>
         <p:spPr>
           <a:xfrm>
-            <a:off x="684000" y="4968000"/>
-            <a:ext cx="39600" cy="1152000"/>
+            <a:off x="684000" y="4500000"/>
+            <a:ext cx="39600" cy="864000"/>
           </a:xfrm>
           <a:prstGeom prst="rect">
             <a:avLst/>
@@ -22118,14 +23029,14 @@
       </p:sp>
       <p:sp>
         <p:nvSpPr>
-          <p:cNvPr id="7" name="TextBox 6"/>
+          <p:cNvPr id="8" name="TextBox 7"/>
           <p:cNvSpPr txBox="1"/>
           <p:nvPr/>
         </p:nvSpPr>
         <p:spPr>
           <a:xfrm>
-            <a:off x="882000" y="5004000"/>
-            <a:ext cx="10548000" cy="1152000"/>
+            <a:off x="882000" y="4536000"/>
+            <a:ext cx="10548000" cy="864000"/>
           </a:xfrm>
           <a:prstGeom prst="rect">
             <a:avLst/>
@@ -22150,20 +23061,20 @@
                 </a:solidFill>
                 <a:latin typeface="Calibri"/>
               </a:rPr>
-              <a:t>Le mode rétrospectif refuse d'afficher le modèle v3 sur 20 des 23 années qu'il pourrait techniquement couvrir : le train parce qu'il a appris ces lignes, la validation parce qu'elle a servi à choisir, l'avenir parce qu'il n'y a pas d'historique. Et il sait dire laquelle des trois raisons s'applique.</a:t>
-            </a:r>
-          </a:p>
-        </p:txBody>
-      </p:sp>
-      <p:sp>
-        <p:nvSpPr>
-          <p:cNvPr id="8" name="TextBox 7"/>
+              <a:t>Le mode rétrospectif refuse d'afficher le modèle v3 sur 20 des 23 années qu'il pourrait techniquement couvrir, et il sait dire laquelle des trois raisons s'applique à la date demandée.</a:t>
+            </a:r>
+          </a:p>
+        </p:txBody>
+      </p:sp>
+      <p:sp>
+        <p:nvSpPr>
+          <p:cNvPr id="9" name="TextBox 8"/>
           <p:cNvSpPr txBox="1"/>
           <p:nvPr/>
         </p:nvSpPr>
         <p:spPr>
           <a:xfrm>
-            <a:off x="684000" y="6300000"/>
+            <a:off x="684000" y="5544000"/>
             <a:ext cx="10800000" cy="503999"/>
           </a:xfrm>
           <a:prstGeom prst="rect">
@@ -22222,7 +23133,46 @@
       <p:grpSpPr/>
       <p:sp>
         <p:nvSpPr>
-          <p:cNvPr id="2" name="Rectangle 1"/>
+          <p:cNvPr id="2" name="TextBox 1"/>
+          <p:cNvSpPr txBox="1"/>
+          <p:nvPr/>
+        </p:nvSpPr>
+        <p:spPr>
+          <a:xfrm>
+            <a:off x="11520000" y="6390000"/>
+            <a:ext cx="503999" cy="251999"/>
+          </a:xfrm>
+          <a:prstGeom prst="rect">
+            <a:avLst/>
+          </a:prstGeom>
+          <a:noFill/>
+        </p:spPr>
+        <p:txBody>
+          <a:bodyPr wrap="square">
+            <a:spAutoFit/>
+          </a:bodyPr>
+          <a:lstStyle/>
+          <a:p>
+            <a:pPr algn="r">
+              <a:lnSpc>
+                <a:spcPct val="125000"/>
+              </a:lnSpc>
+            </a:pPr>
+            <a:r>
+              <a:rPr sz="900" b="0">
+                <a:solidFill>
+                  <a:srgbClr val="6B6963"/>
+                </a:solidFill>
+                <a:latin typeface="Calibri"/>
+              </a:rPr>
+              <a:t>37</a:t>
+            </a:r>
+          </a:p>
+        </p:txBody>
+      </p:sp>
+      <p:sp>
+        <p:nvSpPr>
+          <p:cNvPr id="3" name="Rectangle 2"/>
           <p:cNvSpPr/>
           <p:nvPr/>
         </p:nvSpPr>
@@ -22266,7 +23216,7 @@
       </p:sp>
       <p:sp>
         <p:nvSpPr>
-          <p:cNvPr id="3" name="TextBox 2"/>
+          <p:cNvPr id="4" name="TextBox 3"/>
           <p:cNvSpPr txBox="1"/>
           <p:nvPr/>
         </p:nvSpPr>
@@ -22305,7 +23255,7 @@
       </p:sp>
       <p:graphicFrame>
         <p:nvGraphicFramePr>
-          <p:cNvPr id="4" name="Table 3"/>
+          <p:cNvPr id="5" name="Table 4"/>
           <p:cNvGraphicFramePr>
             <a:graphicFrameLocks noGrp="1"/>
           </p:cNvGraphicFramePr>
@@ -22788,7 +23738,7 @@
       </p:graphicFrame>
       <p:sp>
         <p:nvSpPr>
-          <p:cNvPr id="5" name="Rectangle 4"/>
+          <p:cNvPr id="6" name="Rectangle 5"/>
           <p:cNvSpPr/>
           <p:nvPr/>
         </p:nvSpPr>
@@ -22832,7 +23782,7 @@
       </p:sp>
       <p:sp>
         <p:nvSpPr>
-          <p:cNvPr id="6" name="TextBox 5"/>
+          <p:cNvPr id="7" name="TextBox 6"/>
           <p:cNvSpPr txBox="1"/>
           <p:nvPr/>
         </p:nvSpPr>
@@ -22871,7 +23821,7 @@
       </p:sp>
       <p:sp>
         <p:nvSpPr>
-          <p:cNvPr id="7" name="TextBox 6"/>
+          <p:cNvPr id="8" name="TextBox 7"/>
           <p:cNvSpPr txBox="1"/>
           <p:nvPr/>
         </p:nvSpPr>
@@ -22936,7 +23886,46 @@
       <p:grpSpPr/>
       <p:sp>
         <p:nvSpPr>
-          <p:cNvPr id="2" name="Rectangle 1"/>
+          <p:cNvPr id="2" name="TextBox 1"/>
+          <p:cNvSpPr txBox="1"/>
+          <p:nvPr/>
+        </p:nvSpPr>
+        <p:spPr>
+          <a:xfrm>
+            <a:off x="11520000" y="6390000"/>
+            <a:ext cx="503999" cy="251999"/>
+          </a:xfrm>
+          <a:prstGeom prst="rect">
+            <a:avLst/>
+          </a:prstGeom>
+          <a:noFill/>
+        </p:spPr>
+        <p:txBody>
+          <a:bodyPr wrap="square">
+            <a:spAutoFit/>
+          </a:bodyPr>
+          <a:lstStyle/>
+          <a:p>
+            <a:pPr algn="r">
+              <a:lnSpc>
+                <a:spcPct val="125000"/>
+              </a:lnSpc>
+            </a:pPr>
+            <a:r>
+              <a:rPr sz="900" b="0">
+                <a:solidFill>
+                  <a:srgbClr val="6B6963"/>
+                </a:solidFill>
+                <a:latin typeface="Calibri"/>
+              </a:rPr>
+              <a:t>4</a:t>
+            </a:r>
+          </a:p>
+        </p:txBody>
+      </p:sp>
+      <p:sp>
+        <p:nvSpPr>
+          <p:cNvPr id="3" name="Rectangle 2"/>
           <p:cNvSpPr/>
           <p:nvPr/>
         </p:nvSpPr>
@@ -22980,7 +23969,7 @@
       </p:sp>
       <p:sp>
         <p:nvSpPr>
-          <p:cNvPr id="3" name="TextBox 2"/>
+          <p:cNvPr id="4" name="TextBox 3"/>
           <p:cNvSpPr txBox="1"/>
           <p:nvPr/>
         </p:nvSpPr>
@@ -23019,7 +24008,7 @@
       </p:sp>
       <p:sp>
         <p:nvSpPr>
-          <p:cNvPr id="4" name="TextBox 3"/>
+          <p:cNvPr id="5" name="TextBox 4"/>
           <p:cNvSpPr txBox="1"/>
           <p:nvPr/>
         </p:nvSpPr>
@@ -23058,7 +24047,7 @@
       </p:sp>
       <p:graphicFrame>
         <p:nvGraphicFramePr>
-          <p:cNvPr id="5" name="Table 4"/>
+          <p:cNvPr id="6" name="Table 5"/>
           <p:cNvGraphicFramePr>
             <a:graphicFrameLocks noGrp="1"/>
           </p:cNvGraphicFramePr>
@@ -23066,7 +24055,7 @@
         </p:nvGraphicFramePr>
         <p:xfrm>
           <a:off x="684000" y="1944000"/>
-          <a:ext cx="10800000" cy="2015999"/>
+          <a:ext cx="7380000" cy="2015999"/>
         </p:xfrm>
         <a:graphic>
           <a:graphicData uri="http://schemas.openxmlformats.org/drawingml/2006/table">
@@ -23075,9 +24064,9 @@
                 <a:tableStyleId>{5C22544A-7EE6-4342-B048-85BDC9FD1C3A}</a:tableStyleId>
               </a:tblPr>
               <a:tblGrid>
-                <a:gridCol w="1980000"/>
-                <a:gridCol w="4680000"/>
-                <a:gridCol w="4140000"/>
+                <a:gridCol w="1440000"/>
+                <a:gridCol w="3240000"/>
+                <a:gridCol w="2700000"/>
               </a:tblGrid>
               <a:tr h="403199">
                 <a:tc>
@@ -23086,7 +24075,7 @@
                     <a:lstStyle/>
                     <a:p>
                       <a:r>
-                        <a:rPr sz="1300" b="1">
+                        <a:rPr sz="1200" b="1">
                           <a:solidFill>
                             <a:srgbClr val="FCFCFB"/>
                           </a:solidFill>
@@ -23108,7 +24097,7 @@
                     <a:lstStyle/>
                     <a:p>
                       <a:r>
-                        <a:rPr sz="1300" b="1">
+                        <a:rPr sz="1200" b="1">
                           <a:solidFill>
                             <a:srgbClr val="FCFCFB"/>
                           </a:solidFill>
@@ -23130,7 +24119,7 @@
                     <a:lstStyle/>
                     <a:p>
                       <a:r>
-                        <a:rPr sz="1300" b="1">
+                        <a:rPr sz="1200" b="1">
                           <a:solidFill>
                             <a:srgbClr val="FCFCFB"/>
                           </a:solidFill>
@@ -23154,7 +24143,7 @@
                     <a:lstStyle/>
                     <a:p>
                       <a:r>
-                        <a:rPr sz="1300" b="0">
+                        <a:rPr sz="1200" b="0">
                           <a:solidFill>
                             <a:srgbClr val="6B6963"/>
                           </a:solidFill>
@@ -23176,7 +24165,7 @@
                     <a:lstStyle/>
                     <a:p>
                       <a:r>
-                        <a:rPr sz="1300" b="0">
+                        <a:rPr sz="1200" b="0">
                           <a:solidFill>
                             <a:srgbClr val="6B6963"/>
                           </a:solidFill>
@@ -23198,7 +24187,7 @@
                     <a:lstStyle/>
                     <a:p>
                       <a:r>
-                        <a:rPr sz="1300" b="0">
+                        <a:rPr sz="1200" b="0">
                           <a:solidFill>
                             <a:srgbClr val="6B6963"/>
                           </a:solidFill>
@@ -23222,7 +24211,7 @@
                     <a:lstStyle/>
                     <a:p>
                       <a:r>
-                        <a:rPr sz="1300" b="0">
+                        <a:rPr sz="1200" b="0">
                           <a:solidFill>
                             <a:srgbClr val="6B6963"/>
                           </a:solidFill>
@@ -23244,7 +24233,7 @@
                     <a:lstStyle/>
                     <a:p>
                       <a:r>
-                        <a:rPr sz="1300" b="0">
+                        <a:rPr sz="1200" b="0">
                           <a:solidFill>
                             <a:srgbClr val="6B6963"/>
                           </a:solidFill>
@@ -23266,7 +24255,7 @@
                     <a:lstStyle/>
                     <a:p>
                       <a:r>
-                        <a:rPr sz="1300" b="0">
+                        <a:rPr sz="1200" b="0">
                           <a:solidFill>
                             <a:srgbClr val="6B6963"/>
                           </a:solidFill>
@@ -23290,7 +24279,7 @@
                     <a:lstStyle/>
                     <a:p>
                       <a:r>
-                        <a:rPr sz="1300" b="0">
+                        <a:rPr sz="1200" b="0">
                           <a:solidFill>
                             <a:srgbClr val="6B6963"/>
                           </a:solidFill>
@@ -23312,7 +24301,7 @@
                     <a:lstStyle/>
                     <a:p>
                       <a:r>
-                        <a:rPr sz="1300" b="0">
+                        <a:rPr sz="1200" b="0">
                           <a:solidFill>
                             <a:srgbClr val="6B6963"/>
                           </a:solidFill>
@@ -23334,7 +24323,7 @@
                     <a:lstStyle/>
                     <a:p>
                       <a:r>
-                        <a:rPr sz="1300" b="0">
+                        <a:rPr sz="1200" b="0">
                           <a:solidFill>
                             <a:srgbClr val="6B6963"/>
                           </a:solidFill>
@@ -23358,7 +24347,7 @@
                     <a:lstStyle/>
                     <a:p>
                       <a:r>
-                        <a:rPr sz="1300" b="0">
+                        <a:rPr sz="1200" b="0">
                           <a:solidFill>
                             <a:srgbClr val="6B6963"/>
                           </a:solidFill>
@@ -23380,7 +24369,7 @@
                     <a:lstStyle/>
                     <a:p>
                       <a:r>
-                        <a:rPr sz="1300" b="0">
+                        <a:rPr sz="1200" b="0">
                           <a:solidFill>
                             <a:srgbClr val="6B6963"/>
                           </a:solidFill>
@@ -23402,7 +24391,7 @@
                     <a:lstStyle/>
                     <a:p>
                       <a:r>
-                        <a:rPr sz="1300" b="0">
+                        <a:rPr sz="1200" b="0">
                           <a:solidFill>
                             <a:srgbClr val="6B6963"/>
                           </a:solidFill>
@@ -23425,13 +24414,13 @@
       </p:graphicFrame>
       <p:sp>
         <p:nvSpPr>
-          <p:cNvPr id="6" name="Rectangle 5"/>
+          <p:cNvPr id="7" name="Rectangle 6"/>
           <p:cNvSpPr/>
           <p:nvPr/>
         </p:nvSpPr>
         <p:spPr>
           <a:xfrm>
-            <a:off x="684000" y="4248000"/>
+            <a:off x="684000" y="4176000"/>
             <a:ext cx="39600" cy="1440000"/>
           </a:xfrm>
           <a:prstGeom prst="rect">
@@ -23469,14 +24458,14 @@
       </p:sp>
       <p:sp>
         <p:nvSpPr>
-          <p:cNvPr id="7" name="TextBox 6"/>
+          <p:cNvPr id="8" name="TextBox 7"/>
           <p:cNvSpPr txBox="1"/>
           <p:nvPr/>
         </p:nvSpPr>
         <p:spPr>
           <a:xfrm>
-            <a:off x="882000" y="4284000"/>
-            <a:ext cx="10548000" cy="1440000"/>
+            <a:off x="882000" y="4212000"/>
+            <a:ext cx="7128000" cy="1440000"/>
           </a:xfrm>
           <a:prstGeom prst="rect">
             <a:avLst/>
@@ -23495,13 +24484,13 @@
               </a:lnSpc>
             </a:pPr>
             <a:r>
-              <a:rPr sz="1500" b="0">
+              <a:rPr sz="1400" b="0">
                 <a:solidFill>
                   <a:srgbClr val="0B0B0B"/>
                 </a:solidFill>
                 <a:latin typeface="Calibri"/>
               </a:rPr>
-              <a:t>À l'intérieur d'une même maille météo de 28 km, on trouve en moyenne 31 communes. Elles reçoivent aujourd'hui le même indice de danger, qu'elles soient couvertes de maquis ou bétonnées.</a:t>
+              <a:t>À l'intérieur d'une même maille de 28 km, on trouve en moyenne 31 communes. Elles reçoivent aujourd'hui le même indice de danger, qu'elles soient couvertes de maquis ou bétonnées.</a:t>
             </a:r>
           </a:p>
           <a:p>
@@ -23511,17 +24500,41 @@
               </a:lnSpc>
             </a:pPr>
             <a:r>
-              <a:rPr sz="1500" b="0">
+              <a:rPr sz="1400" b="0">
                 <a:solidFill>
                   <a:srgbClr val="0B0B0B"/>
                 </a:solidFill>
                 <a:latin typeface="Calibri"/>
               </a:rPr>
-              <a:t>C'est précisément l'écart que ce travail cherche à combler : la météo dit quand, elle ne dit pas où.</a:t>
-            </a:r>
-          </a:p>
-        </p:txBody>
-      </p:sp>
+              <a:t>C'est l'écart que ce travail cherche à combler : la météo dit quand, elle ne dit pas où.</a:t>
+            </a:r>
+          </a:p>
+        </p:txBody>
+      </p:sp>
+      <p:pic>
+        <p:nvPicPr>
+          <p:cNvPr id="9" name="Picture 8" descr="02_grille-cems-0-25-1131-cellules-france-sur-2360.png"/>
+          <p:cNvPicPr>
+            <a:picLocks noChangeAspect="1"/>
+          </p:cNvPicPr>
+          <p:nvPr/>
+        </p:nvPicPr>
+        <p:blipFill>
+          <a:blip r:embed="rId2"/>
+          <a:stretch>
+            <a:fillRect/>
+          </a:stretch>
+        </p:blipFill>
+        <p:spPr>
+          <a:xfrm>
+            <a:off x="8280000" y="2143574"/>
+            <a:ext cx="3240000" cy="3272851"/>
+          </a:xfrm>
+          <a:prstGeom prst="rect">
+            <a:avLst/>
+          </a:prstGeom>
+        </p:spPr>
+      </p:pic>
     </p:spTree>
   </p:cSld>
   <p:clrMapOvr>
@@ -23556,6 +24569,45 @@
         </p:nvSpPr>
         <p:spPr>
           <a:xfrm>
+            <a:off x="11520000" y="6390000"/>
+            <a:ext cx="503999" cy="251999"/>
+          </a:xfrm>
+          <a:prstGeom prst="rect">
+            <a:avLst/>
+          </a:prstGeom>
+          <a:noFill/>
+        </p:spPr>
+        <p:txBody>
+          <a:bodyPr wrap="square">
+            <a:spAutoFit/>
+          </a:bodyPr>
+          <a:lstStyle/>
+          <a:p>
+            <a:pPr algn="r">
+              <a:lnSpc>
+                <a:spcPct val="125000"/>
+              </a:lnSpc>
+            </a:pPr>
+            <a:r>
+              <a:rPr sz="900" b="0">
+                <a:solidFill>
+                  <a:srgbClr val="C3C2B7"/>
+                </a:solidFill>
+                <a:latin typeface="Calibri"/>
+              </a:rPr>
+              <a:t>5</a:t>
+            </a:r>
+          </a:p>
+        </p:txBody>
+      </p:sp>
+      <p:sp>
+        <p:nvSpPr>
+          <p:cNvPr id="3" name="TextBox 2"/>
+          <p:cNvSpPr txBox="1"/>
+          <p:nvPr/>
+        </p:nvSpPr>
+        <p:spPr>
+          <a:xfrm>
             <a:off x="684000" y="2268000"/>
             <a:ext cx="2160000" cy="503999"/>
           </a:xfrm>
@@ -23589,7 +24641,7 @@
       </p:sp>
       <p:sp>
         <p:nvSpPr>
-          <p:cNvPr id="3" name="TextBox 2"/>
+          <p:cNvPr id="4" name="TextBox 3"/>
           <p:cNvSpPr txBox="1"/>
           <p:nvPr/>
         </p:nvSpPr>
@@ -23628,7 +24680,7 @@
       </p:sp>
       <p:sp>
         <p:nvSpPr>
-          <p:cNvPr id="4" name="TextBox 3"/>
+          <p:cNvPr id="5" name="TextBox 4"/>
           <p:cNvSpPr txBox="1"/>
           <p:nvPr/>
         </p:nvSpPr>
@@ -23693,7 +24745,46 @@
       <p:grpSpPr/>
       <p:sp>
         <p:nvSpPr>
-          <p:cNvPr id="2" name="Rectangle 1"/>
+          <p:cNvPr id="2" name="TextBox 1"/>
+          <p:cNvSpPr txBox="1"/>
+          <p:nvPr/>
+        </p:nvSpPr>
+        <p:spPr>
+          <a:xfrm>
+            <a:off x="11520000" y="6390000"/>
+            <a:ext cx="503999" cy="251999"/>
+          </a:xfrm>
+          <a:prstGeom prst="rect">
+            <a:avLst/>
+          </a:prstGeom>
+          <a:noFill/>
+        </p:spPr>
+        <p:txBody>
+          <a:bodyPr wrap="square">
+            <a:spAutoFit/>
+          </a:bodyPr>
+          <a:lstStyle/>
+          <a:p>
+            <a:pPr algn="r">
+              <a:lnSpc>
+                <a:spcPct val="125000"/>
+              </a:lnSpc>
+            </a:pPr>
+            <a:r>
+              <a:rPr sz="900" b="0">
+                <a:solidFill>
+                  <a:srgbClr val="6B6963"/>
+                </a:solidFill>
+                <a:latin typeface="Calibri"/>
+              </a:rPr>
+              <a:t>6</a:t>
+            </a:r>
+          </a:p>
+        </p:txBody>
+      </p:sp>
+      <p:sp>
+        <p:nvSpPr>
+          <p:cNvPr id="3" name="Rectangle 2"/>
           <p:cNvSpPr/>
           <p:nvPr/>
         </p:nvSpPr>
@@ -23737,7 +24828,7 @@
       </p:sp>
       <p:sp>
         <p:nvSpPr>
-          <p:cNvPr id="3" name="TextBox 2"/>
+          <p:cNvPr id="4" name="TextBox 3"/>
           <p:cNvSpPr txBox="1"/>
           <p:nvPr/>
         </p:nvSpPr>
@@ -23776,7 +24867,7 @@
       </p:sp>
       <p:sp>
         <p:nvSpPr>
-          <p:cNvPr id="4" name="Rectangle 3"/>
+          <p:cNvPr id="5" name="Rectangle 4"/>
           <p:cNvSpPr/>
           <p:nvPr/>
         </p:nvSpPr>
@@ -23820,7 +24911,7 @@
       </p:sp>
       <p:sp>
         <p:nvSpPr>
-          <p:cNvPr id="5" name="TextBox 4"/>
+          <p:cNvPr id="6" name="TextBox 5"/>
           <p:cNvSpPr txBox="1"/>
           <p:nvPr/>
         </p:nvSpPr>
@@ -23859,7 +24950,7 @@
       </p:sp>
       <p:sp>
         <p:nvSpPr>
-          <p:cNvPr id="6" name="TextBox 5"/>
+          <p:cNvPr id="7" name="TextBox 6"/>
           <p:cNvSpPr txBox="1"/>
           <p:nvPr/>
         </p:nvSpPr>
@@ -23898,7 +24989,7 @@
       </p:sp>
       <p:graphicFrame>
         <p:nvGraphicFramePr>
-          <p:cNvPr id="7" name="Table 6"/>
+          <p:cNvPr id="8" name="Table 7"/>
           <p:cNvGraphicFramePr>
             <a:graphicFrameLocks noGrp="1"/>
           </p:cNvGraphicFramePr>
@@ -24291,7 +25382,46 @@
       <p:grpSpPr/>
       <p:sp>
         <p:nvSpPr>
-          <p:cNvPr id="2" name="Rectangle 1"/>
+          <p:cNvPr id="2" name="TextBox 1"/>
+          <p:cNvSpPr txBox="1"/>
+          <p:nvPr/>
+        </p:nvSpPr>
+        <p:spPr>
+          <a:xfrm>
+            <a:off x="11520000" y="6390000"/>
+            <a:ext cx="503999" cy="251999"/>
+          </a:xfrm>
+          <a:prstGeom prst="rect">
+            <a:avLst/>
+          </a:prstGeom>
+          <a:noFill/>
+        </p:spPr>
+        <p:txBody>
+          <a:bodyPr wrap="square">
+            <a:spAutoFit/>
+          </a:bodyPr>
+          <a:lstStyle/>
+          <a:p>
+            <a:pPr algn="r">
+              <a:lnSpc>
+                <a:spcPct val="125000"/>
+              </a:lnSpc>
+            </a:pPr>
+            <a:r>
+              <a:rPr sz="900" b="0">
+                <a:solidFill>
+                  <a:srgbClr val="6B6963"/>
+                </a:solidFill>
+                <a:latin typeface="Calibri"/>
+              </a:rPr>
+              <a:t>7</a:t>
+            </a:r>
+          </a:p>
+        </p:txBody>
+      </p:sp>
+      <p:sp>
+        <p:nvSpPr>
+          <p:cNvPr id="3" name="Rectangle 2"/>
           <p:cNvSpPr/>
           <p:nvPr/>
         </p:nvSpPr>
@@ -24335,7 +25465,7 @@
       </p:sp>
       <p:sp>
         <p:nvSpPr>
-          <p:cNvPr id="3" name="TextBox 2"/>
+          <p:cNvPr id="4" name="TextBox 3"/>
           <p:cNvSpPr txBox="1"/>
           <p:nvPr/>
         </p:nvSpPr>
@@ -24374,7 +25504,7 @@
       </p:sp>
       <p:sp>
         <p:nvSpPr>
-          <p:cNvPr id="4" name="TextBox 3"/>
+          <p:cNvPr id="5" name="TextBox 4"/>
           <p:cNvSpPr txBox="1"/>
           <p:nvPr/>
         </p:nvSpPr>
@@ -24413,7 +25543,7 @@
       </p:sp>
       <p:sp>
         <p:nvSpPr>
-          <p:cNvPr id="5" name="TextBox 4"/>
+          <p:cNvPr id="6" name="TextBox 5"/>
           <p:cNvSpPr txBox="1"/>
           <p:nvPr/>
         </p:nvSpPr>
@@ -24452,7 +25582,7 @@
       </p:sp>
       <p:sp>
         <p:nvSpPr>
-          <p:cNvPr id="6" name="TextBox 5"/>
+          <p:cNvPr id="7" name="TextBox 6"/>
           <p:cNvSpPr txBox="1"/>
           <p:nvPr/>
         </p:nvSpPr>
@@ -24507,7 +25637,7 @@
       </p:sp>
       <p:sp>
         <p:nvSpPr>
-          <p:cNvPr id="7" name="TextBox 6"/>
+          <p:cNvPr id="8" name="TextBox 7"/>
           <p:cNvSpPr txBox="1"/>
           <p:nvPr/>
         </p:nvSpPr>
@@ -24546,7 +25676,7 @@
       </p:sp>
       <p:sp>
         <p:nvSpPr>
-          <p:cNvPr id="8" name="TextBox 7"/>
+          <p:cNvPr id="9" name="TextBox 8"/>
           <p:cNvSpPr txBox="1"/>
           <p:nvPr/>
         </p:nvSpPr>
@@ -24585,7 +25715,7 @@
       </p:sp>
       <p:sp>
         <p:nvSpPr>
-          <p:cNvPr id="9" name="TextBox 8"/>
+          <p:cNvPr id="10" name="TextBox 9"/>
           <p:cNvSpPr txBox="1"/>
           <p:nvPr/>
         </p:nvSpPr>
@@ -24624,7 +25754,7 @@
       </p:sp>
       <p:sp>
         <p:nvSpPr>
-          <p:cNvPr id="10" name="TextBox 9"/>
+          <p:cNvPr id="11" name="TextBox 10"/>
           <p:cNvSpPr txBox="1"/>
           <p:nvPr/>
         </p:nvSpPr>
@@ -24663,7 +25793,7 @@
       </p:sp>
       <p:sp>
         <p:nvSpPr>
-          <p:cNvPr id="11" name="TextBox 10"/>
+          <p:cNvPr id="12" name="TextBox 11"/>
           <p:cNvSpPr txBox="1"/>
           <p:nvPr/>
         </p:nvSpPr>
@@ -24702,7 +25832,7 @@
       </p:sp>
       <p:sp>
         <p:nvSpPr>
-          <p:cNvPr id="12" name="TextBox 11"/>
+          <p:cNvPr id="13" name="TextBox 12"/>
           <p:cNvSpPr txBox="1"/>
           <p:nvPr/>
         </p:nvSpPr>
@@ -24773,6 +25903,45 @@
         </p:nvSpPr>
         <p:spPr>
           <a:xfrm>
+            <a:off x="11520000" y="6390000"/>
+            <a:ext cx="503999" cy="251999"/>
+          </a:xfrm>
+          <a:prstGeom prst="rect">
+            <a:avLst/>
+          </a:prstGeom>
+          <a:noFill/>
+        </p:spPr>
+        <p:txBody>
+          <a:bodyPr wrap="square">
+            <a:spAutoFit/>
+          </a:bodyPr>
+          <a:lstStyle/>
+          <a:p>
+            <a:pPr algn="r">
+              <a:lnSpc>
+                <a:spcPct val="125000"/>
+              </a:lnSpc>
+            </a:pPr>
+            <a:r>
+              <a:rPr sz="900" b="0">
+                <a:solidFill>
+                  <a:srgbClr val="C3C2B7"/>
+                </a:solidFill>
+                <a:latin typeface="Calibri"/>
+              </a:rPr>
+              <a:t>8</a:t>
+            </a:r>
+          </a:p>
+        </p:txBody>
+      </p:sp>
+      <p:sp>
+        <p:nvSpPr>
+          <p:cNvPr id="3" name="TextBox 2"/>
+          <p:cNvSpPr txBox="1"/>
+          <p:nvPr/>
+        </p:nvSpPr>
+        <p:spPr>
+          <a:xfrm>
             <a:off x="684000" y="2268000"/>
             <a:ext cx="2160000" cy="503999"/>
           </a:xfrm>
@@ -24806,7 +25975,7 @@
       </p:sp>
       <p:sp>
         <p:nvSpPr>
-          <p:cNvPr id="3" name="TextBox 2"/>
+          <p:cNvPr id="4" name="TextBox 3"/>
           <p:cNvSpPr txBox="1"/>
           <p:nvPr/>
         </p:nvSpPr>
@@ -24845,7 +26014,7 @@
       </p:sp>
       <p:sp>
         <p:nvSpPr>
-          <p:cNvPr id="4" name="TextBox 3"/>
+          <p:cNvPr id="5" name="TextBox 4"/>
           <p:cNvSpPr txBox="1"/>
           <p:nvPr/>
         </p:nvSpPr>
@@ -24910,7 +26079,46 @@
       <p:grpSpPr/>
       <p:sp>
         <p:nvSpPr>
-          <p:cNvPr id="2" name="Rectangle 1"/>
+          <p:cNvPr id="2" name="TextBox 1"/>
+          <p:cNvSpPr txBox="1"/>
+          <p:nvPr/>
+        </p:nvSpPr>
+        <p:spPr>
+          <a:xfrm>
+            <a:off x="11520000" y="6390000"/>
+            <a:ext cx="503999" cy="251999"/>
+          </a:xfrm>
+          <a:prstGeom prst="rect">
+            <a:avLst/>
+          </a:prstGeom>
+          <a:noFill/>
+        </p:spPr>
+        <p:txBody>
+          <a:bodyPr wrap="square">
+            <a:spAutoFit/>
+          </a:bodyPr>
+          <a:lstStyle/>
+          <a:p>
+            <a:pPr algn="r">
+              <a:lnSpc>
+                <a:spcPct val="125000"/>
+              </a:lnSpc>
+            </a:pPr>
+            <a:r>
+              <a:rPr sz="900" b="0">
+                <a:solidFill>
+                  <a:srgbClr val="6B6963"/>
+                </a:solidFill>
+                <a:latin typeface="Calibri"/>
+              </a:rPr>
+              <a:t>9</a:t>
+            </a:r>
+          </a:p>
+        </p:txBody>
+      </p:sp>
+      <p:sp>
+        <p:nvSpPr>
+          <p:cNvPr id="3" name="Rectangle 2"/>
           <p:cNvSpPr/>
           <p:nvPr/>
         </p:nvSpPr>
@@ -24954,7 +26162,7 @@
       </p:sp>
       <p:sp>
         <p:nvSpPr>
-          <p:cNvPr id="3" name="TextBox 2"/>
+          <p:cNvPr id="4" name="TextBox 3"/>
           <p:cNvSpPr txBox="1"/>
           <p:nvPr/>
         </p:nvSpPr>
@@ -24993,7 +26201,7 @@
       </p:sp>
       <p:sp>
         <p:nvSpPr>
-          <p:cNvPr id="4" name="TextBox 3"/>
+          <p:cNvPr id="5" name="TextBox 4"/>
           <p:cNvSpPr txBox="1"/>
           <p:nvPr/>
         </p:nvSpPr>
@@ -25032,7 +26240,7 @@
       </p:sp>
       <p:graphicFrame>
         <p:nvGraphicFramePr>
-          <p:cNvPr id="5" name="Table 4"/>
+          <p:cNvPr id="6" name="Table 5"/>
           <p:cNvGraphicFramePr>
             <a:graphicFrameLocks noGrp="1"/>
           </p:cNvGraphicFramePr>
@@ -25040,7 +26248,7 @@
         </p:nvGraphicFramePr>
         <p:xfrm>
           <a:off x="684000" y="1944000"/>
-          <a:ext cx="10800000" cy="2160000"/>
+          <a:ext cx="6300000" cy="2160000"/>
         </p:xfrm>
         <a:graphic>
           <a:graphicData uri="http://schemas.openxmlformats.org/drawingml/2006/table">
@@ -25049,9 +26257,9 @@
                 <a:tableStyleId>{5C22544A-7EE6-4342-B048-85BDC9FD1C3A}</a:tableStyleId>
               </a:tblPr>
               <a:tblGrid>
-                <a:gridCol w="2520000"/>
-                <a:gridCol w="5040000"/>
-                <a:gridCol w="3240000"/>
+                <a:gridCol w="1620000"/>
+                <a:gridCol w="2700000"/>
+                <a:gridCol w="1980000"/>
               </a:tblGrid>
               <a:tr h="432000">
                 <a:tc>
@@ -25060,7 +26268,7 @@
                     <a:lstStyle/>
                     <a:p>
                       <a:r>
-                        <a:rPr sz="1300" b="1">
+                        <a:rPr sz="1200" b="1">
                           <a:solidFill>
                             <a:srgbClr val="FCFCFB"/>
                           </a:solidFill>
@@ -25082,7 +26290,7 @@
                     <a:lstStyle/>
                     <a:p>
                       <a:r>
-                        <a:rPr sz="1300" b="1">
+                        <a:rPr sz="1200" b="1">
                           <a:solidFill>
                             <a:srgbClr val="FCFCFB"/>
                           </a:solidFill>
@@ -25104,7 +26312,7 @@
                     <a:lstStyle/>
                     <a:p>
                       <a:r>
-                        <a:rPr sz="1300" b="1">
+                        <a:rPr sz="1200" b="1">
                           <a:solidFill>
                             <a:srgbClr val="FCFCFB"/>
                           </a:solidFill>
@@ -25128,7 +26336,7 @@
                     <a:lstStyle/>
                     <a:p>
                       <a:r>
-                        <a:rPr sz="1300" b="0">
+                        <a:rPr sz="1200" b="0">
                           <a:solidFill>
                             <a:srgbClr val="6B6963"/>
                           </a:solidFill>
@@ -25150,7 +26358,7 @@
                     <a:lstStyle/>
                     <a:p>
                       <a:r>
-                        <a:rPr sz="1300" b="0">
+                        <a:rPr sz="1200" b="0">
                           <a:solidFill>
                             <a:srgbClr val="6B6963"/>
                           </a:solidFill>
@@ -25172,7 +26380,7 @@
                     <a:lstStyle/>
                     <a:p>
                       <a:r>
-                        <a:rPr sz="1300" b="0">
+                        <a:rPr sz="1200" b="0">
                           <a:solidFill>
                             <a:srgbClr val="6B6963"/>
                           </a:solidFill>
@@ -25196,7 +26404,7 @@
                     <a:lstStyle/>
                     <a:p>
                       <a:r>
-                        <a:rPr sz="1300" b="0">
+                        <a:rPr sz="1200" b="0">
                           <a:solidFill>
                             <a:srgbClr val="6B6963"/>
                           </a:solidFill>
@@ -25218,7 +26426,7 @@
                     <a:lstStyle/>
                     <a:p>
                       <a:r>
-                        <a:rPr sz="1300" b="0">
+                        <a:rPr sz="1200" b="0">
                           <a:solidFill>
                             <a:srgbClr val="6B6963"/>
                           </a:solidFill>
@@ -25240,7 +26448,7 @@
                     <a:lstStyle/>
                     <a:p>
                       <a:r>
-                        <a:rPr sz="1300" b="0">
+                        <a:rPr sz="1200" b="0">
                           <a:solidFill>
                             <a:srgbClr val="6B6963"/>
                           </a:solidFill>
@@ -25264,7 +26472,7 @@
                     <a:lstStyle/>
                     <a:p>
                       <a:r>
-                        <a:rPr sz="1300" b="0">
+                        <a:rPr sz="1200" b="0">
                           <a:solidFill>
                             <a:srgbClr val="6B6963"/>
                           </a:solidFill>
@@ -25286,7 +26494,7 @@
                     <a:lstStyle/>
                     <a:p>
                       <a:r>
-                        <a:rPr sz="1300" b="0">
+                        <a:rPr sz="1200" b="0">
                           <a:solidFill>
                             <a:srgbClr val="6B6963"/>
                           </a:solidFill>
@@ -25308,7 +26516,7 @@
                     <a:lstStyle/>
                     <a:p>
                       <a:r>
-                        <a:rPr sz="1300" b="0">
+                        <a:rPr sz="1200" b="0">
                           <a:solidFill>
                             <a:srgbClr val="6B6963"/>
                           </a:solidFill>
@@ -25332,7 +26540,7 @@
                     <a:lstStyle/>
                     <a:p>
                       <a:r>
-                        <a:rPr sz="1300" b="0">
+                        <a:rPr sz="1200" b="0">
                           <a:solidFill>
                             <a:srgbClr val="6B6963"/>
                           </a:solidFill>
@@ -25354,7 +26562,7 @@
                     <a:lstStyle/>
                     <a:p>
                       <a:r>
-                        <a:rPr sz="1300" b="0">
+                        <a:rPr sz="1200" b="0">
                           <a:solidFill>
                             <a:srgbClr val="6B6963"/>
                           </a:solidFill>
@@ -25376,7 +26584,7 @@
                     <a:lstStyle/>
                     <a:p>
                       <a:r>
-                        <a:rPr sz="1300" b="0">
+                        <a:rPr sz="1200" b="0">
                           <a:solidFill>
                             <a:srgbClr val="6B6963"/>
                           </a:solidFill>
@@ -25397,9 +26605,72 @@
           </a:graphicData>
         </a:graphic>
       </p:graphicFrame>
-      <p:sp>
-        <p:nvSpPr>
-          <p:cNvPr id="6" name="Rectangle 5"/>
+      <p:pic>
+        <p:nvPicPr>
+          <p:cNvPr id="7" name="Picture 6" descr="03_34-734-communes-metropolitaines-un-centroide-par-commune.png"/>
+          <p:cNvPicPr>
+            <a:picLocks noChangeAspect="1"/>
+          </p:cNvPicPr>
+          <p:nvPr/>
+        </p:nvPicPr>
+        <p:blipFill>
+          <a:blip r:embed="rId2"/>
+          <a:stretch>
+            <a:fillRect/>
+          </a:stretch>
+        </p:blipFill>
+        <p:spPr>
+          <a:xfrm>
+            <a:off x="7056000" y="2219920"/>
+            <a:ext cx="4464000" cy="1536159"/>
+          </a:xfrm>
+          <a:prstGeom prst="rect">
+            <a:avLst/>
+          </a:prstGeom>
+        </p:spPr>
+      </p:pic>
+      <p:sp>
+        <p:nvSpPr>
+          <p:cNvPr id="8" name="TextBox 7"/>
+          <p:cNvSpPr txBox="1"/>
+          <p:nvPr/>
+        </p:nvSpPr>
+        <p:spPr>
+          <a:xfrm>
+            <a:off x="7056000" y="3888000"/>
+            <a:ext cx="4464000" cy="503999"/>
+          </a:xfrm>
+          <a:prstGeom prst="rect">
+            <a:avLst/>
+          </a:prstGeom>
+          <a:noFill/>
+        </p:spPr>
+        <p:txBody>
+          <a:bodyPr wrap="square">
+            <a:spAutoFit/>
+          </a:bodyPr>
+          <a:lstStyle/>
+          <a:p>
+            <a:pPr>
+              <a:lnSpc>
+                <a:spcPct val="125000"/>
+              </a:lnSpc>
+            </a:pPr>
+            <a:r>
+              <a:rPr sz="1200" b="0">
+                <a:solidFill>
+                  <a:srgbClr val="6B6963"/>
+                </a:solidFill>
+                <a:latin typeface="Calibri"/>
+              </a:rPr>
+              <a:t>Le référentiel INSEE, une ligne par commune : population, altitude et densité pour les 34 734 communes.</a:t>
+            </a:r>
+          </a:p>
+        </p:txBody>
+      </p:sp>
+      <p:sp>
+        <p:nvSpPr>
+          <p:cNvPr id="9" name="Rectangle 8"/>
           <p:cNvSpPr/>
           <p:nvPr/>
         </p:nvSpPr>
@@ -25443,7 +26714,7 @@
       </p:sp>
       <p:sp>
         <p:nvSpPr>
-          <p:cNvPr id="7" name="TextBox 6"/>
+          <p:cNvPr id="10" name="TextBox 9"/>
           <p:cNvSpPr txBox="1"/>
           <p:nvPr/>
         </p:nvSpPr>
